--- a/Science_Teesside/Teaching_Packs/BUILD/lessons/W4A/BUILD_Science_Autumn1_W4A_Muscle_Pairs.pptx
+++ b/Science_Teesside/Teaching_Packs/BUILD/lessons/W4A/BUILD_Science_Autumn1_W4A_Muscle_Pairs.pptx
@@ -2,23 +2,23 @@
 <file path=ppt/presentation.xml><?xml version="1.0" encoding="utf-8"?>
 <p:presentation xmlns:p="http://schemas.openxmlformats.org/presentationml/2006/main">
   <p:sldMasterIdLst>
-    <p:sldMasterId xmlns:r="http://schemas.openxmlformats.org/officeDocument/2006/relationships" id="2147483648" r:id="Re6ffaea28e9b4d1b"/>
+    <p:sldMasterId xmlns:r="http://schemas.openxmlformats.org/officeDocument/2006/relationships" id="2147483648" r:id="R70c1775479fa4fef"/>
   </p:sldMasterIdLst>
   <p:notesMasterIdLst>
-    <p:notesMasterId xmlns:r="http://schemas.openxmlformats.org/officeDocument/2006/relationships" r:id="Re5a34f3e5fe14610"/>
+    <p:notesMasterId xmlns:r="http://schemas.openxmlformats.org/officeDocument/2006/relationships" r:id="R314d7baf3029484c"/>
   </p:notesMasterIdLst>
   <p:sldIdLst>
-    <p:sldId xmlns:r="http://schemas.openxmlformats.org/officeDocument/2006/relationships" id="256" r:id="R6f4a94bd02094e89"/>
-    <p:sldId xmlns:r="http://schemas.openxmlformats.org/officeDocument/2006/relationships" id="257" r:id="R1ec444978612416f"/>
-    <p:sldId xmlns:r="http://schemas.openxmlformats.org/officeDocument/2006/relationships" id="258" r:id="Re889080630ef437e"/>
-    <p:sldId xmlns:r="http://schemas.openxmlformats.org/officeDocument/2006/relationships" id="259" r:id="R35d1a0ae72644567"/>
-    <p:sldId xmlns:r="http://schemas.openxmlformats.org/officeDocument/2006/relationships" id="260" r:id="R87ebd52b74ac48e7"/>
-    <p:sldId xmlns:r="http://schemas.openxmlformats.org/officeDocument/2006/relationships" id="261" r:id="R8a7f8cce53dc49d3"/>
-    <p:sldId xmlns:r="http://schemas.openxmlformats.org/officeDocument/2006/relationships" id="262" r:id="R505414a4210a4913"/>
-    <p:sldId xmlns:r="http://schemas.openxmlformats.org/officeDocument/2006/relationships" id="263" r:id="R32b3787335d04659"/>
-    <p:sldId xmlns:r="http://schemas.openxmlformats.org/officeDocument/2006/relationships" id="264" r:id="R4fdd8c99cbdf4fa0"/>
-    <p:sldId xmlns:r="http://schemas.openxmlformats.org/officeDocument/2006/relationships" id="265" r:id="R7f6c175f06f7486f"/>
-    <p:sldId xmlns:r="http://schemas.openxmlformats.org/officeDocument/2006/relationships" id="266" r:id="R3340b387d7a04182"/>
+    <p:sldId xmlns:r="http://schemas.openxmlformats.org/officeDocument/2006/relationships" id="256" r:id="R26a01ab4815c4241"/>
+    <p:sldId xmlns:r="http://schemas.openxmlformats.org/officeDocument/2006/relationships" id="257" r:id="R3ce9a16ea126493d"/>
+    <p:sldId xmlns:r="http://schemas.openxmlformats.org/officeDocument/2006/relationships" id="258" r:id="R21f412ac7b4647a7"/>
+    <p:sldId xmlns:r="http://schemas.openxmlformats.org/officeDocument/2006/relationships" id="259" r:id="Rfba5d4d76e95404d"/>
+    <p:sldId xmlns:r="http://schemas.openxmlformats.org/officeDocument/2006/relationships" id="260" r:id="Rdc48204e25b044ab"/>
+    <p:sldId xmlns:r="http://schemas.openxmlformats.org/officeDocument/2006/relationships" id="261" r:id="Rf57fa49ab06e410f"/>
+    <p:sldId xmlns:r="http://schemas.openxmlformats.org/officeDocument/2006/relationships" id="262" r:id="Ra5b240de2f6c422e"/>
+    <p:sldId xmlns:r="http://schemas.openxmlformats.org/officeDocument/2006/relationships" id="263" r:id="Rcef975a0ed9843e2"/>
+    <p:sldId xmlns:r="http://schemas.openxmlformats.org/officeDocument/2006/relationships" id="264" r:id="Ree86ef04fe8b4b7f"/>
+    <p:sldId xmlns:r="http://schemas.openxmlformats.org/officeDocument/2006/relationships" id="265" r:id="Ra0f3d2681fd54b9d"/>
+    <p:sldId xmlns:r="http://schemas.openxmlformats.org/officeDocument/2006/relationships" id="266" r:id="R71ca840e65f048b4"/>
   </p:sldIdLst>
   <p:sldSz cx="12192000" cy="6858000"/>
   <p:notesSz cx="6858000" cy="9144000"/>
@@ -500,6 +500,15 @@
               <a:t>[/Sources]</a:t>
             </a:r>
           </a:p>
+          <a:p xmlns:a="http://schemas.openxmlformats.org/drawingml/2006/main">
+            <a:r>
+              <a:t>
+[Sources]
+https://madebymatt.uk/Lessons/Science_Teesside/Teaching_Packs/BUILD/ — original lesson text, timings and teacher notes retained.
+https://madebymatt.uk/Lessons/Science_Teesside/Build/ — existing Made by Matt scientific artwork, where shown.
+[/Sources]</a:t>
+            </a:r>
+          </a:p>
         </p:txBody>
       </p:sp>
       <p:sp>
@@ -615,6 +624,15 @@
               <a:t>[/Sources]</a:t>
             </a:r>
           </a:p>
+          <a:p xmlns:a="http://schemas.openxmlformats.org/drawingml/2006/main">
+            <a:r>
+              <a:t>
+[Sources]
+https://madebymatt.uk/Lessons/Science_Teesside/Teaching_Packs/BUILD/ — original lesson text, timings and teacher notes retained.
+https://madebymatt.uk/Lessons/Science_Teesside/Build/ — existing Made by Matt scientific artwork, where shown.
+[/Sources]</a:t>
+            </a:r>
+          </a:p>
         </p:txBody>
       </p:sp>
       <p:sp>
@@ -730,6 +748,15 @@
               <a:t>[/Sources]</a:t>
             </a:r>
           </a:p>
+          <a:p xmlns:a="http://schemas.openxmlformats.org/drawingml/2006/main">
+            <a:r>
+              <a:t>
+[Sources]
+https://madebymatt.uk/Lessons/Science_Teesside/Teaching_Packs/BUILD/ — original lesson text, timings and teacher notes retained.
+https://madebymatt.uk/Lessons/Science_Teesside/Build/ — existing Made by Matt scientific artwork, where shown.
+[/Sources]</a:t>
+            </a:r>
+          </a:p>
         </p:txBody>
       </p:sp>
       <p:sp>
@@ -845,6 +872,15 @@
               <a:t>[/Sources]</a:t>
             </a:r>
           </a:p>
+          <a:p xmlns:a="http://schemas.openxmlformats.org/drawingml/2006/main">
+            <a:r>
+              <a:t>
+[Sources]
+https://madebymatt.uk/Lessons/Science_Teesside/Teaching_Packs/BUILD/ — original lesson text, timings and teacher notes retained.
+https://madebymatt.uk/Lessons/Science_Teesside/Build/ — existing Made by Matt scientific artwork, where shown.
+[/Sources]</a:t>
+            </a:r>
+          </a:p>
         </p:txBody>
       </p:sp>
       <p:sp>
@@ -960,6 +996,15 @@
               <a:t>[/Sources]</a:t>
             </a:r>
           </a:p>
+          <a:p xmlns:a="http://schemas.openxmlformats.org/drawingml/2006/main">
+            <a:r>
+              <a:t>
+[Sources]
+https://madebymatt.uk/Lessons/Science_Teesside/Teaching_Packs/BUILD/ — original lesson text, timings and teacher notes retained.
+https://madebymatt.uk/Lessons/Science_Teesside/Build/ — existing Made by Matt scientific artwork, where shown.
+[/Sources]</a:t>
+            </a:r>
+          </a:p>
         </p:txBody>
       </p:sp>
       <p:sp>
@@ -1075,6 +1120,15 @@
               <a:t>[/Sources]</a:t>
             </a:r>
           </a:p>
+          <a:p xmlns:a="http://schemas.openxmlformats.org/drawingml/2006/main">
+            <a:r>
+              <a:t>
+[Sources]
+https://madebymatt.uk/Lessons/Science_Teesside/Teaching_Packs/BUILD/ — original lesson text, timings and teacher notes retained.
+https://madebymatt.uk/Lessons/Science_Teesside/Build/ — existing Made by Matt scientific artwork, where shown.
+[/Sources]</a:t>
+            </a:r>
+          </a:p>
         </p:txBody>
       </p:sp>
       <p:sp>
@@ -1190,6 +1244,15 @@
               <a:t>[/Sources]</a:t>
             </a:r>
           </a:p>
+          <a:p xmlns:a="http://schemas.openxmlformats.org/drawingml/2006/main">
+            <a:r>
+              <a:t>
+[Sources]
+https://madebymatt.uk/Lessons/Science_Teesside/Teaching_Packs/BUILD/ — original lesson text, timings and teacher notes retained.
+https://madebymatt.uk/Lessons/Science_Teesside/Build/ — existing Made by Matt scientific artwork, where shown.
+[/Sources]</a:t>
+            </a:r>
+          </a:p>
         </p:txBody>
       </p:sp>
       <p:sp>
@@ -1305,6 +1368,15 @@
               <a:t>[/Sources]</a:t>
             </a:r>
           </a:p>
+          <a:p xmlns:a="http://schemas.openxmlformats.org/drawingml/2006/main">
+            <a:r>
+              <a:t>
+[Sources]
+https://madebymatt.uk/Lessons/Science_Teesside/Teaching_Packs/BUILD/ — original lesson text, timings and teacher notes retained.
+https://madebymatt.uk/Lessons/Science_Teesside/Build/ — existing Made by Matt scientific artwork, where shown.
+[/Sources]</a:t>
+            </a:r>
+          </a:p>
         </p:txBody>
       </p:sp>
       <p:sp>
@@ -1420,6 +1492,15 @@
               <a:t>[/Sources]</a:t>
             </a:r>
           </a:p>
+          <a:p xmlns:a="http://schemas.openxmlformats.org/drawingml/2006/main">
+            <a:r>
+              <a:t>
+[Sources]
+https://madebymatt.uk/Lessons/Science_Teesside/Teaching_Packs/BUILD/ — original lesson text, timings and teacher notes retained.
+https://madebymatt.uk/Lessons/Science_Teesside/Build/ — existing Made by Matt scientific artwork, where shown.
+[/Sources]</a:t>
+            </a:r>
+          </a:p>
         </p:txBody>
       </p:sp>
       <p:sp>
@@ -1535,6 +1616,15 @@
               <a:t>[/Sources]</a:t>
             </a:r>
           </a:p>
+          <a:p xmlns:a="http://schemas.openxmlformats.org/drawingml/2006/main">
+            <a:r>
+              <a:t>
+[Sources]
+https://madebymatt.uk/Lessons/Science_Teesside/Teaching_Packs/BUILD/ — original lesson text, timings and teacher notes retained.
+https://madebymatt.uk/Lessons/Science_Teesside/Build/ — existing Made by Matt scientific artwork, where shown.
+[/Sources]</a:t>
+            </a:r>
+          </a:p>
         </p:txBody>
       </p:sp>
       <p:sp>
@@ -1648,6 +1738,15 @@
           <a:p xmlns:a="http://schemas.openxmlformats.org/drawingml/2006/main">
             <a:r>
               <a:t>[/Sources]</a:t>
+            </a:r>
+          </a:p>
+          <a:p xmlns:a="http://schemas.openxmlformats.org/drawingml/2006/main">
+            <a:r>
+              <a:t>
+[Sources]
+https://madebymatt.uk/Lessons/Science_Teesside/Teaching_Packs/BUILD/ — original lesson text, timings and teacher notes retained.
+https://madebymatt.uk/Lessons/Science_Teesside/Build/ — existing Made by Matt scientific artwork, where shown.
+[/Sources]</a:t>
             </a:r>
           </a:p>
         </p:txBody>
@@ -1715,7 +1814,7 @@
   </p:cSld>
   <p:clrMap bg1="lt1" tx1="dk1" bg2="lt2" tx2="dk2" accent1="accent1" accent2="accent2" accent3="accent3" accent4="accent4" accent5="accent5" accent6="accent6" hlink="hlink" folHlink="folHlink"/>
   <p:sldLayoutIdLst>
-    <p:sldLayoutId xmlns:r="http://schemas.openxmlformats.org/officeDocument/2006/relationships" id="2147483649" r:id="R7c1fa8097f5043c9"/>
+    <p:sldLayoutId xmlns:r="http://schemas.openxmlformats.org/officeDocument/2006/relationships" id="2147483649" r:id="Rf60ab8ebc5c045df"/>
   </p:sldLayoutIdLst>
   <p:txStyles>
     <p:titleStyle>
@@ -2248,7 +2347,7 @@
     <p:bg>
       <p:bgPr>
         <a:solidFill xmlns:a="http://schemas.openxmlformats.org/drawingml/2006/main">
-          <a:srgbClr val="F5F1E8"/>
+          <a:srgbClr val="FBF9F3"/>
         </a:solidFill>
       </p:bgPr>
     </p:bg>
@@ -2277,8 +2376,8 @@
         </p:nvSpPr>
         <p:spPr>
           <a:xfrm xmlns:a="http://schemas.openxmlformats.org/drawingml/2006/main">
-            <a:off x="609600" y="552450"/>
-            <a:ext cx="781050" cy="57150"/>
+            <a:off x="609600" y="742950"/>
+            <a:ext cx="9906000" cy="38100"/>
           </a:xfrm>
           <a:prstGeom xmlns:a="http://schemas.openxmlformats.org/drawingml/2006/main" prst="rect">
             <a:avLst/>
@@ -2308,8 +2407,8 @@
         </p:nvSpPr>
         <p:spPr>
           <a:xfrm xmlns:a="http://schemas.openxmlformats.org/drawingml/2006/main">
-            <a:off x="609600" y="762000"/>
-            <a:ext cx="9334500" cy="285750"/>
+            <a:off x="609600" y="342900"/>
+            <a:ext cx="9334500" cy="266700"/>
           </a:xfrm>
           <a:prstGeom xmlns:a="http://schemas.openxmlformats.org/drawingml/2006/main" prst="rect">
             <a:avLst/>
@@ -2321,21 +2420,30 @@
           </a:ln>
         </p:spPr>
         <p:txBody>
-          <a:bodyPr xmlns:a="http://schemas.openxmlformats.org/drawingml/2006/main" lIns="0" tIns="0" rIns="0" bIns="0" anchor="ctr"/>
+          <a:bodyPr xmlns:a="http://schemas.openxmlformats.org/drawingml/2006/main" wrap="square" lIns="0" tIns="0" rIns="0" bIns="0" anchor="ctr">
+            <a:noAutofit/>
+          </a:bodyPr>
           <a:lstStyle xmlns:a="http://schemas.openxmlformats.org/drawingml/2006/main"/>
           <a:p xmlns:a="http://schemas.openxmlformats.org/drawingml/2006/main">
             <a:pPr>
-              <a:defRPr sz="1500" b="1">
+              <a:buNone/>
+              <a:defRPr sz="1425" b="1">
                 <a:solidFill>
                   <a:srgbClr val="28685E"/>
                 </a:solidFill>
+                <a:latin typeface="Arial"/>
+                <a:ea typeface="Arial"/>
+                <a:cs typeface="Arial"/>
               </a:defRPr>
             </a:pPr>
             <a:r>
-              <a:rPr sz="1500" b="1">
+              <a:rPr sz="1425" b="1">
                 <a:solidFill>
                   <a:srgbClr val="28685E"/>
                 </a:solidFill>
+                <a:latin typeface="Arial"/>
+                <a:ea typeface="Arial"/>
+                <a:cs typeface="Arial"/>
               </a:rPr>
               <a:t>MADE BY MATT  /  BUILD SCIENCE</a:t>
             </a:r>
@@ -2344,14 +2452,14 @@
       </p:sp>
       <p:pic>
         <p:nvPicPr>
-          <p:cNvPr id="12" name=""/>
+          <p:cNvPr id="15" name=""/>
           <p:cNvPicPr>
             <a:picLocks xmlns:a="http://schemas.openxmlformats.org/drawingml/2006/main" noChangeAspect="1"/>
           </p:cNvPicPr>
           <p:nvPr/>
         </p:nvPicPr>
         <p:blipFill>
-          <a:blip xmlns:r="http://schemas.openxmlformats.org/officeDocument/2006/relationships" xmlns:a="http://schemas.openxmlformats.org/drawingml/2006/main" r:embed="R323769db05274e3b"/>
+          <a:blip xmlns:r="http://schemas.openxmlformats.org/officeDocument/2006/relationships" xmlns:a="http://schemas.openxmlformats.org/drawingml/2006/main" r:embed="R042755599347447c"/>
           <a:stretch xmlns:a="http://schemas.openxmlformats.org/drawingml/2006/main"/>
         </p:blipFill>
         <p:spPr>
@@ -2380,8 +2488,8 @@
         </p:nvSpPr>
         <p:spPr>
           <a:xfrm xmlns:a="http://schemas.openxmlformats.org/drawingml/2006/main">
-            <a:off x="609600" y="1352550"/>
-            <a:ext cx="10972800" cy="952500"/>
+            <a:off x="609600" y="1047750"/>
+            <a:ext cx="10972800" cy="895350"/>
           </a:xfrm>
           <a:prstGeom xmlns:a="http://schemas.openxmlformats.org/drawingml/2006/main" prst="rect">
             <a:avLst/>
@@ -2393,21 +2501,30 @@
           </a:ln>
         </p:spPr>
         <p:txBody>
-          <a:bodyPr xmlns:a="http://schemas.openxmlformats.org/drawingml/2006/main" lIns="0" tIns="0" rIns="0" bIns="0" anchor="ctr"/>
+          <a:bodyPr xmlns:a="http://schemas.openxmlformats.org/drawingml/2006/main" wrap="square" lIns="0" tIns="0" rIns="0" bIns="0" anchor="ctr">
+            <a:noAutofit/>
+          </a:bodyPr>
           <a:lstStyle xmlns:a="http://schemas.openxmlformats.org/drawingml/2006/main"/>
           <a:p xmlns:a="http://schemas.openxmlformats.org/drawingml/2006/main">
             <a:pPr>
-              <a:defRPr sz="3750" b="1">
+              <a:buNone/>
+              <a:defRPr sz="3600" b="1">
                 <a:solidFill>
                   <a:srgbClr val="152B3A"/>
                 </a:solidFill>
+                <a:latin typeface="Arial"/>
+                <a:ea typeface="Arial"/>
+                <a:cs typeface="Arial"/>
               </a:defRPr>
             </a:pPr>
             <a:r>
-              <a:rPr sz="3750" b="1">
+              <a:rPr sz="3600" b="1">
                 <a:solidFill>
                   <a:srgbClr val="152B3A"/>
                 </a:solidFill>
+                <a:latin typeface="Arial"/>
+                <a:ea typeface="Arial"/>
+                <a:cs typeface="Arial"/>
               </a:rPr>
               <a:t>Muscles work in pairs</a:t>
             </a:r>
@@ -2474,21 +2591,30 @@
           </a:ln>
         </p:spPr>
         <p:txBody>
-          <a:bodyPr xmlns:a="http://schemas.openxmlformats.org/drawingml/2006/main" lIns="0" tIns="0" rIns="0" bIns="0" anchor="ctr"/>
+          <a:bodyPr xmlns:a="http://schemas.openxmlformats.org/drawingml/2006/main" wrap="square" lIns="0" tIns="0" rIns="0" bIns="0" anchor="ctr">
+            <a:noAutofit/>
+          </a:bodyPr>
           <a:lstStyle xmlns:a="http://schemas.openxmlformats.org/drawingml/2006/main"/>
           <a:p xmlns:a="http://schemas.openxmlformats.org/drawingml/2006/main">
             <a:pPr>
-              <a:defRPr sz="1275" b="0">
+              <a:buNone/>
+              <a:defRPr sz="1200" b="0">
                 <a:solidFill>
                   <a:srgbClr val="50616B"/>
                 </a:solidFill>
+                <a:latin typeface="Arial"/>
+                <a:ea typeface="Arial"/>
+                <a:cs typeface="Arial"/>
               </a:defRPr>
             </a:pPr>
             <a:r>
-              <a:rPr sz="1275" b="0">
+              <a:rPr sz="1200" b="0">
                 <a:solidFill>
                   <a:srgbClr val="50616B"/>
                 </a:solidFill>
+                <a:latin typeface="Arial"/>
+                <a:ea typeface="Arial"/>
+                <a:cs typeface="Arial"/>
               </a:rPr>
               <a:t>AUTUMN 1  ·  WEEK 4  ·  LESSON A</a:t>
             </a:r>
@@ -2524,14 +2650,20 @@
           </a:ln>
         </p:spPr>
         <p:txBody>
-          <a:bodyPr xmlns:a="http://schemas.openxmlformats.org/drawingml/2006/main" lIns="0" tIns="0" rIns="0" bIns="0" anchor="ctr"/>
+          <a:bodyPr xmlns:a="http://schemas.openxmlformats.org/drawingml/2006/main" wrap="square" lIns="0" tIns="0" rIns="0" bIns="0" anchor="ctr">
+            <a:noAutofit/>
+          </a:bodyPr>
           <a:lstStyle xmlns:a="http://schemas.openxmlformats.org/drawingml/2006/main"/>
           <a:p xmlns:a="http://schemas.openxmlformats.org/drawingml/2006/main">
             <a:pPr>
+              <a:buNone/>
               <a:defRPr sz="1350" b="1">
                 <a:solidFill>
                   <a:srgbClr val="28685E"/>
                 </a:solidFill>
+                <a:latin typeface="Arial"/>
+                <a:ea typeface="Arial"/>
+                <a:cs typeface="Arial"/>
               </a:defRPr>
             </a:pPr>
             <a:r>
@@ -2539,6 +2671,9 @@
                 <a:solidFill>
                   <a:srgbClr val="28685E"/>
                 </a:solidFill>
+                <a:latin typeface="Arial"/>
+                <a:ea typeface="Arial"/>
+                <a:cs typeface="Arial"/>
               </a:rPr>
               <a:t>01</a:t>
             </a:r>
@@ -2561,8 +2696,8 @@
         </p:nvSpPr>
         <p:spPr>
           <a:xfrm xmlns:a="http://schemas.openxmlformats.org/drawingml/2006/main">
-            <a:off x="609600" y="2809875"/>
-            <a:ext cx="10668000" cy="1000125"/>
+            <a:off x="609600" y="2400300"/>
+            <a:ext cx="6191250" cy="1409700"/>
           </a:xfrm>
           <a:prstGeom xmlns:a="http://schemas.openxmlformats.org/drawingml/2006/main" prst="rect">
             <a:avLst/>
@@ -2574,21 +2709,30 @@
           </a:ln>
         </p:spPr>
         <p:txBody>
-          <a:bodyPr xmlns:a="http://schemas.openxmlformats.org/drawingml/2006/main" lIns="0" tIns="0" rIns="0" bIns="0" anchor="ctr"/>
+          <a:bodyPr xmlns:a="http://schemas.openxmlformats.org/drawingml/2006/main" wrap="square" lIns="0" tIns="0" rIns="0" bIns="0" anchor="ctr">
+            <a:noAutofit/>
+          </a:bodyPr>
           <a:lstStyle xmlns:a="http://schemas.openxmlformats.org/drawingml/2006/main"/>
           <a:p xmlns:a="http://schemas.openxmlformats.org/drawingml/2006/main">
             <a:pPr>
-              <a:defRPr sz="3900" b="1">
+              <a:buNone/>
+              <a:defRPr sz="3450" b="1">
                 <a:solidFill>
                   <a:srgbClr val="28685E"/>
                 </a:solidFill>
+                <a:latin typeface="Arial"/>
+                <a:ea typeface="Arial"/>
+                <a:cs typeface="Arial"/>
               </a:defRPr>
             </a:pPr>
             <a:r>
-              <a:rPr sz="3900" b="1">
+              <a:rPr sz="3450" b="1">
                 <a:solidFill>
                   <a:srgbClr val="28685E"/>
                 </a:solidFill>
+                <a:latin typeface="Arial"/>
+                <a:ea typeface="Arial"/>
+                <a:cs typeface="Arial"/>
               </a:rPr>
               <a:t>Two muscles. Two pulling jobs.</a:t>
             </a:r>
@@ -2611,8 +2755,8 @@
         </p:nvSpPr>
         <p:spPr>
           <a:xfrm xmlns:a="http://schemas.openxmlformats.org/drawingml/2006/main">
-            <a:off x="609600" y="4143375"/>
-            <a:ext cx="10668000" cy="1143000"/>
+            <a:off x="609600" y="4286250"/>
+            <a:ext cx="6667500" cy="1314450"/>
           </a:xfrm>
           <a:prstGeom xmlns:a="http://schemas.openxmlformats.org/drawingml/2006/main" prst="rect">
             <a:avLst/>
@@ -2624,27 +2768,58 @@
           </a:ln>
         </p:spPr>
         <p:txBody>
-          <a:bodyPr xmlns:a="http://schemas.openxmlformats.org/drawingml/2006/main" lIns="0" tIns="0" rIns="0" bIns="0" anchor="ctr"/>
+          <a:bodyPr xmlns:a="http://schemas.openxmlformats.org/drawingml/2006/main" wrap="square" lIns="0" tIns="0" rIns="0" bIns="0" anchor="ctr">
+            <a:noAutofit/>
+          </a:bodyPr>
           <a:lstStyle xmlns:a="http://schemas.openxmlformats.org/drawingml/2006/main"/>
           <a:p xmlns:a="http://schemas.openxmlformats.org/drawingml/2006/main">
             <a:pPr>
-              <a:defRPr sz="2550" b="0">
+              <a:buNone/>
+              <a:defRPr sz="2400" b="0">
                 <a:solidFill>
                   <a:srgbClr val="152B3A"/>
                 </a:solidFill>
+                <a:latin typeface="Arial"/>
+                <a:ea typeface="Arial"/>
+                <a:cs typeface="Arial"/>
               </a:defRPr>
             </a:pPr>
             <a:r>
-              <a:rPr sz="2550" b="0">
+              <a:rPr sz="2400" b="0">
                 <a:solidFill>
                   <a:srgbClr val="152B3A"/>
                 </a:solidFill>
+                <a:latin typeface="Arial"/>
+                <a:ea typeface="Arial"/>
+                <a:cs typeface="Arial"/>
               </a:rPr>
               <a:t>I can explain a bend and an active straighten at the elbow.</a:t>
             </a:r>
           </a:p>
         </p:txBody>
       </p:sp>
+      <p:pic>
+        <p:nvPicPr>
+          <p:cNvPr id="22" name=""/>
+          <p:cNvPicPr>
+            <a:picLocks xmlns:a="http://schemas.openxmlformats.org/drawingml/2006/main" noChangeAspect="1"/>
+          </p:cNvPicPr>
+          <p:nvPr/>
+        </p:nvPicPr>
+        <p:blipFill>
+          <a:blip xmlns:r="http://schemas.openxmlformats.org/officeDocument/2006/relationships" xmlns:a="http://schemas.openxmlformats.org/drawingml/2006/main" r:embed="R2ac79bb8c6454561"/>
+          <a:stretch xmlns:a="http://schemas.openxmlformats.org/drawingml/2006/main"/>
+        </p:blipFill>
+        <p:spPr>
+          <a:xfrm xmlns:a="http://schemas.openxmlformats.org/drawingml/2006/main">
+            <a:off x="7620000" y="2369344"/>
+            <a:ext cx="3714750" cy="2786063"/>
+          </a:xfrm>
+          <a:prstGeom xmlns:a="http://schemas.openxmlformats.org/drawingml/2006/main" prst="rect">
+            <a:avLst/>
+          </a:prstGeom>
+        </p:spPr>
+      </p:pic>
     </p:spTree>
     <p:extLst>
       <p:ext uri="{BB962C8B-B14F-4D97-AF65-F5344CB8AC3E}">
@@ -2661,7 +2836,7 @@
     <p:bg>
       <p:bgPr>
         <a:solidFill xmlns:a="http://schemas.openxmlformats.org/drawingml/2006/main">
-          <a:srgbClr val="F5F1E8"/>
+          <a:srgbClr val="FBF9F3"/>
         </a:solidFill>
       </p:bgPr>
     </p:bg>
@@ -2690,8 +2865,8 @@
         </p:nvSpPr>
         <p:spPr>
           <a:xfrm xmlns:a="http://schemas.openxmlformats.org/drawingml/2006/main">
-            <a:off x="609600" y="552450"/>
-            <a:ext cx="781050" cy="57150"/>
+            <a:off x="609600" y="742950"/>
+            <a:ext cx="9906000" cy="38100"/>
           </a:xfrm>
           <a:prstGeom xmlns:a="http://schemas.openxmlformats.org/drawingml/2006/main" prst="rect">
             <a:avLst/>
@@ -2721,8 +2896,8 @@
         </p:nvSpPr>
         <p:spPr>
           <a:xfrm xmlns:a="http://schemas.openxmlformats.org/drawingml/2006/main">
-            <a:off x="609600" y="762000"/>
-            <a:ext cx="9334500" cy="285750"/>
+            <a:off x="609600" y="342900"/>
+            <a:ext cx="9334500" cy="266700"/>
           </a:xfrm>
           <a:prstGeom xmlns:a="http://schemas.openxmlformats.org/drawingml/2006/main" prst="rect">
             <a:avLst/>
@@ -2734,21 +2909,30 @@
           </a:ln>
         </p:spPr>
         <p:txBody>
-          <a:bodyPr xmlns:a="http://schemas.openxmlformats.org/drawingml/2006/main" lIns="0" tIns="0" rIns="0" bIns="0" anchor="ctr"/>
+          <a:bodyPr xmlns:a="http://schemas.openxmlformats.org/drawingml/2006/main" wrap="square" lIns="0" tIns="0" rIns="0" bIns="0" anchor="ctr">
+            <a:noAutofit/>
+          </a:bodyPr>
           <a:lstStyle xmlns:a="http://schemas.openxmlformats.org/drawingml/2006/main"/>
           <a:p xmlns:a="http://schemas.openxmlformats.org/drawingml/2006/main">
             <a:pPr>
-              <a:defRPr sz="1500" b="1">
+              <a:buNone/>
+              <a:defRPr sz="1425" b="1">
                 <a:solidFill>
                   <a:srgbClr val="28685E"/>
                 </a:solidFill>
+                <a:latin typeface="Arial"/>
+                <a:ea typeface="Arial"/>
+                <a:cs typeface="Arial"/>
               </a:defRPr>
             </a:pPr>
             <a:r>
-              <a:rPr sz="1500" b="1">
+              <a:rPr sz="1425" b="1">
                 <a:solidFill>
                   <a:srgbClr val="28685E"/>
                 </a:solidFill>
+                <a:latin typeface="Arial"/>
+                <a:ea typeface="Arial"/>
+                <a:cs typeface="Arial"/>
               </a:rPr>
               <a:t>MADE BY MATT  /  BUILD SCIENCE</a:t>
             </a:r>
@@ -2757,14 +2941,14 @@
       </p:sp>
       <p:pic>
         <p:nvPicPr>
-          <p:cNvPr id="14" name=""/>
+          <p:cNvPr id="18" name=""/>
           <p:cNvPicPr>
             <a:picLocks xmlns:a="http://schemas.openxmlformats.org/drawingml/2006/main" noChangeAspect="1"/>
           </p:cNvPicPr>
           <p:nvPr/>
         </p:nvPicPr>
         <p:blipFill>
-          <a:blip xmlns:r="http://schemas.openxmlformats.org/officeDocument/2006/relationships" xmlns:a="http://schemas.openxmlformats.org/drawingml/2006/main" r:embed="R32206280aa6f44bd"/>
+          <a:blip xmlns:r="http://schemas.openxmlformats.org/officeDocument/2006/relationships" xmlns:a="http://schemas.openxmlformats.org/drawingml/2006/main" r:embed="R5a0ac3c207dc4a6b"/>
           <a:stretch xmlns:a="http://schemas.openxmlformats.org/drawingml/2006/main"/>
         </p:blipFill>
         <p:spPr>
@@ -2793,8 +2977,8 @@
         </p:nvSpPr>
         <p:spPr>
           <a:xfrm xmlns:a="http://schemas.openxmlformats.org/drawingml/2006/main">
-            <a:off x="609600" y="1352550"/>
-            <a:ext cx="10972800" cy="952500"/>
+            <a:off x="609600" y="1047750"/>
+            <a:ext cx="10972800" cy="895350"/>
           </a:xfrm>
           <a:prstGeom xmlns:a="http://schemas.openxmlformats.org/drawingml/2006/main" prst="rect">
             <a:avLst/>
@@ -2806,21 +2990,30 @@
           </a:ln>
         </p:spPr>
         <p:txBody>
-          <a:bodyPr xmlns:a="http://schemas.openxmlformats.org/drawingml/2006/main" lIns="0" tIns="0" rIns="0" bIns="0" anchor="ctr"/>
+          <a:bodyPr xmlns:a="http://schemas.openxmlformats.org/drawingml/2006/main" wrap="square" lIns="0" tIns="0" rIns="0" bIns="0" anchor="ctr">
+            <a:noAutofit/>
+          </a:bodyPr>
           <a:lstStyle xmlns:a="http://schemas.openxmlformats.org/drawingml/2006/main"/>
           <a:p xmlns:a="http://schemas.openxmlformats.org/drawingml/2006/main">
             <a:pPr>
-              <a:defRPr sz="3750" b="1">
+              <a:buNone/>
+              <a:defRPr sz="3600" b="1">
                 <a:solidFill>
                   <a:srgbClr val="152B3A"/>
                 </a:solidFill>
+                <a:latin typeface="Arial"/>
+                <a:ea typeface="Arial"/>
+                <a:cs typeface="Arial"/>
               </a:defRPr>
             </a:pPr>
             <a:r>
-              <a:rPr sz="3750" b="1">
+              <a:rPr sz="3600" b="1">
                 <a:solidFill>
                   <a:srgbClr val="152B3A"/>
                 </a:solidFill>
+                <a:latin typeface="Arial"/>
+                <a:ea typeface="Arial"/>
+                <a:cs typeface="Arial"/>
               </a:rPr>
               <a:t>True or needs correcting?</a:t>
             </a:r>
@@ -2887,21 +3080,30 @@
           </a:ln>
         </p:spPr>
         <p:txBody>
-          <a:bodyPr xmlns:a="http://schemas.openxmlformats.org/drawingml/2006/main" lIns="0" tIns="0" rIns="0" bIns="0" anchor="ctr"/>
+          <a:bodyPr xmlns:a="http://schemas.openxmlformats.org/drawingml/2006/main" wrap="square" lIns="0" tIns="0" rIns="0" bIns="0" anchor="ctr">
+            <a:noAutofit/>
+          </a:bodyPr>
           <a:lstStyle xmlns:a="http://schemas.openxmlformats.org/drawingml/2006/main"/>
           <a:p xmlns:a="http://schemas.openxmlformats.org/drawingml/2006/main">
             <a:pPr>
-              <a:defRPr sz="1275" b="0">
+              <a:buNone/>
+              <a:defRPr sz="1200" b="0">
                 <a:solidFill>
                   <a:srgbClr val="50616B"/>
                 </a:solidFill>
+                <a:latin typeface="Arial"/>
+                <a:ea typeface="Arial"/>
+                <a:cs typeface="Arial"/>
               </a:defRPr>
             </a:pPr>
             <a:r>
-              <a:rPr sz="1275" b="0">
+              <a:rPr sz="1200" b="0">
                 <a:solidFill>
                   <a:srgbClr val="50616B"/>
                 </a:solidFill>
+                <a:latin typeface="Arial"/>
+                <a:ea typeface="Arial"/>
+                <a:cs typeface="Arial"/>
               </a:rPr>
               <a:t>AUTUMN 1  ·  WEEK 4  ·  LESSON A</a:t>
             </a:r>
@@ -2937,14 +3139,20 @@
           </a:ln>
         </p:spPr>
         <p:txBody>
-          <a:bodyPr xmlns:a="http://schemas.openxmlformats.org/drawingml/2006/main" lIns="0" tIns="0" rIns="0" bIns="0" anchor="ctr"/>
+          <a:bodyPr xmlns:a="http://schemas.openxmlformats.org/drawingml/2006/main" wrap="square" lIns="0" tIns="0" rIns="0" bIns="0" anchor="ctr">
+            <a:noAutofit/>
+          </a:bodyPr>
           <a:lstStyle xmlns:a="http://schemas.openxmlformats.org/drawingml/2006/main"/>
           <a:p xmlns:a="http://schemas.openxmlformats.org/drawingml/2006/main">
             <a:pPr>
+              <a:buNone/>
               <a:defRPr sz="1350" b="1">
                 <a:solidFill>
                   <a:srgbClr val="28685E"/>
                 </a:solidFill>
+                <a:latin typeface="Arial"/>
+                <a:ea typeface="Arial"/>
+                <a:cs typeface="Arial"/>
               </a:defRPr>
             </a:pPr>
             <a:r>
@@ -2952,6 +3160,9 @@
                 <a:solidFill>
                   <a:srgbClr val="28685E"/>
                 </a:solidFill>
+                <a:latin typeface="Arial"/>
+                <a:ea typeface="Arial"/>
+                <a:cs typeface="Arial"/>
               </a:rPr>
               <a:t>10</a:t>
             </a:r>
@@ -2974,8 +3185,8 @@
         </p:nvSpPr>
         <p:spPr>
           <a:xfrm xmlns:a="http://schemas.openxmlformats.org/drawingml/2006/main">
-            <a:off x="609600" y="2619375"/>
-            <a:ext cx="4953000" cy="428625"/>
+            <a:off x="609600" y="2257425"/>
+            <a:ext cx="5143500" cy="533400"/>
           </a:xfrm>
           <a:prstGeom xmlns:a="http://schemas.openxmlformats.org/drawingml/2006/main" prst="rect">
             <a:avLst/>
@@ -2987,21 +3198,30 @@
           </a:ln>
         </p:spPr>
         <p:txBody>
-          <a:bodyPr xmlns:a="http://schemas.openxmlformats.org/drawingml/2006/main" lIns="0" tIns="0" rIns="0" bIns="0" anchor="ctr"/>
+          <a:bodyPr xmlns:a="http://schemas.openxmlformats.org/drawingml/2006/main" wrap="square" lIns="0" tIns="0" rIns="0" bIns="0" anchor="ctr">
+            <a:noAutofit/>
+          </a:bodyPr>
           <a:lstStyle xmlns:a="http://schemas.openxmlformats.org/drawingml/2006/main"/>
           <a:p xmlns:a="http://schemas.openxmlformats.org/drawingml/2006/main">
             <a:pPr>
-              <a:defRPr sz="2025" b="1">
+              <a:buNone/>
+              <a:defRPr sz="2100" b="1">
                 <a:solidFill>
                   <a:srgbClr val="28685E"/>
                 </a:solidFill>
+                <a:latin typeface="Arial"/>
+                <a:ea typeface="Arial"/>
+                <a:cs typeface="Arial"/>
               </a:defRPr>
             </a:pPr>
             <a:r>
-              <a:rPr sz="2025" b="1">
+              <a:rPr sz="2100" b="1">
                 <a:solidFill>
                   <a:srgbClr val="28685E"/>
                 </a:solidFill>
+                <a:latin typeface="Arial"/>
+                <a:ea typeface="Arial"/>
+                <a:cs typeface="Arial"/>
               </a:rPr>
               <a:t>READ EACH CLAIM</a:t>
             </a:r>
@@ -3024,8 +3244,8 @@
         </p:nvSpPr>
         <p:spPr>
           <a:xfrm xmlns:a="http://schemas.openxmlformats.org/drawingml/2006/main">
-            <a:off x="6572250" y="2619375"/>
-            <a:ext cx="4953000" cy="428625"/>
+            <a:off x="6572250" y="2257425"/>
+            <a:ext cx="5010150" cy="533400"/>
           </a:xfrm>
           <a:prstGeom xmlns:a="http://schemas.openxmlformats.org/drawingml/2006/main" prst="rect">
             <a:avLst/>
@@ -3037,21 +3257,30 @@
           </a:ln>
         </p:spPr>
         <p:txBody>
-          <a:bodyPr xmlns:a="http://schemas.openxmlformats.org/drawingml/2006/main" lIns="0" tIns="0" rIns="0" bIns="0" anchor="ctr"/>
+          <a:bodyPr xmlns:a="http://schemas.openxmlformats.org/drawingml/2006/main" wrap="square" lIns="0" tIns="0" rIns="0" bIns="0" anchor="ctr">
+            <a:noAutofit/>
+          </a:bodyPr>
           <a:lstStyle xmlns:a="http://schemas.openxmlformats.org/drawingml/2006/main"/>
           <a:p xmlns:a="http://schemas.openxmlformats.org/drawingml/2006/main">
             <a:pPr>
-              <a:defRPr sz="2025" b="1">
+              <a:buNone/>
+              <a:defRPr sz="2100" b="1">
                 <a:solidFill>
                   <a:srgbClr val="A65D25"/>
                 </a:solidFill>
+                <a:latin typeface="Arial"/>
+                <a:ea typeface="Arial"/>
+                <a:cs typeface="Arial"/>
               </a:defRPr>
             </a:pPr>
             <a:r>
-              <a:rPr sz="2025" b="1">
+              <a:rPr sz="2100" b="1">
                 <a:solidFill>
                   <a:srgbClr val="A65D25"/>
                 </a:solidFill>
+                <a:latin typeface="Arial"/>
+                <a:ea typeface="Arial"/>
+                <a:cs typeface="Arial"/>
               </a:rPr>
               <a:t>EXPLAIN THE CORRECTION</a:t>
             </a:r>
@@ -3074,8 +3303,8 @@
         </p:nvSpPr>
         <p:spPr>
           <a:xfrm xmlns:a="http://schemas.openxmlformats.org/drawingml/2006/main">
-            <a:off x="609600" y="3333750"/>
-            <a:ext cx="4953000" cy="2524125"/>
+            <a:off x="609600" y="3238500"/>
+            <a:ext cx="5143500" cy="2286000"/>
           </a:xfrm>
           <a:prstGeom xmlns:a="http://schemas.openxmlformats.org/drawingml/2006/main" prst="rect">
             <a:avLst/>
@@ -3087,14 +3316,20 @@
           </a:ln>
         </p:spPr>
         <p:txBody>
-          <a:bodyPr xmlns:a="http://schemas.openxmlformats.org/drawingml/2006/main" lIns="0" tIns="0" rIns="0" bIns="0" anchor="ctr"/>
+          <a:bodyPr xmlns:a="http://schemas.openxmlformats.org/drawingml/2006/main" wrap="square" lIns="0" tIns="0" rIns="0" bIns="0" anchor="ctr">
+            <a:noAutofit/>
+          </a:bodyPr>
           <a:lstStyle xmlns:a="http://schemas.openxmlformats.org/drawingml/2006/main"/>
           <a:p xmlns:a="http://schemas.openxmlformats.org/drawingml/2006/main">
             <a:pPr>
+              <a:buNone/>
               <a:defRPr sz="2400" b="0">
                 <a:solidFill>
                   <a:srgbClr val="152B3A"/>
                 </a:solidFill>
+                <a:latin typeface="Arial"/>
+                <a:ea typeface="Arial"/>
+                <a:cs typeface="Arial"/>
               </a:defRPr>
             </a:pPr>
             <a:r>
@@ -3102,16 +3337,23 @@
                 <a:solidFill>
                   <a:srgbClr val="152B3A"/>
                 </a:solidFill>
+                <a:latin typeface="Arial"/>
+                <a:ea typeface="Arial"/>
+                <a:cs typeface="Arial"/>
               </a:rPr>
               <a:t>Muscles can pull.</a:t>
             </a:r>
           </a:p>
           <a:p xmlns:a="http://schemas.openxmlformats.org/drawingml/2006/main">
             <a:pPr>
+              <a:buNone/>
               <a:defRPr sz="2400" b="0">
                 <a:solidFill>
                   <a:srgbClr val="152B3A"/>
                 </a:solidFill>
+                <a:latin typeface="Arial"/>
+                <a:ea typeface="Arial"/>
+                <a:cs typeface="Arial"/>
               </a:defRPr>
             </a:pPr>
             <a:r>
@@ -3119,16 +3361,23 @@
                 <a:solidFill>
                   <a:srgbClr val="152B3A"/>
                 </a:solidFill>
+                <a:latin typeface="Arial"/>
+                <a:ea typeface="Arial"/>
+                <a:cs typeface="Arial"/>
               </a:rPr>
               <a:t>Muscles can push bones.</a:t>
             </a:r>
           </a:p>
           <a:p xmlns:a="http://schemas.openxmlformats.org/drawingml/2006/main">
             <a:pPr>
+              <a:buNone/>
               <a:defRPr sz="2400" b="0">
                 <a:solidFill>
                   <a:srgbClr val="152B3A"/>
                 </a:solidFill>
+                <a:latin typeface="Arial"/>
+                <a:ea typeface="Arial"/>
+                <a:cs typeface="Arial"/>
               </a:defRPr>
             </a:pPr>
             <a:r>
@@ -3136,6 +3385,9 @@
                 <a:solidFill>
                   <a:srgbClr val="152B3A"/>
                 </a:solidFill>
+                <a:latin typeface="Arial"/>
+                <a:ea typeface="Arial"/>
+                <a:cs typeface="Arial"/>
               </a:rPr>
               <a:t>Biceps and triceps form a pair.</a:t>
             </a:r>
@@ -3158,8 +3410,8 @@
         </p:nvSpPr>
         <p:spPr>
           <a:xfrm xmlns:a="http://schemas.openxmlformats.org/drawingml/2006/main">
-            <a:off x="6572250" y="3333750"/>
-            <a:ext cx="4857750" cy="2524125"/>
+            <a:off x="6572250" y="3238500"/>
+            <a:ext cx="5010150" cy="2286000"/>
           </a:xfrm>
           <a:prstGeom xmlns:a="http://schemas.openxmlformats.org/drawingml/2006/main" prst="rect">
             <a:avLst/>
@@ -3171,14 +3423,20 @@
           </a:ln>
         </p:spPr>
         <p:txBody>
-          <a:bodyPr xmlns:a="http://schemas.openxmlformats.org/drawingml/2006/main" lIns="0" tIns="0" rIns="0" bIns="0" anchor="ctr"/>
+          <a:bodyPr xmlns:a="http://schemas.openxmlformats.org/drawingml/2006/main" wrap="square" lIns="0" tIns="0" rIns="0" bIns="0" anchor="ctr">
+            <a:noAutofit/>
+          </a:bodyPr>
           <a:lstStyle xmlns:a="http://schemas.openxmlformats.org/drawingml/2006/main"/>
           <a:p xmlns:a="http://schemas.openxmlformats.org/drawingml/2006/main">
             <a:pPr>
+              <a:buNone/>
               <a:defRPr sz="2400" b="0">
                 <a:solidFill>
                   <a:srgbClr val="152B3A"/>
                 </a:solidFill>
+                <a:latin typeface="Arial"/>
+                <a:ea typeface="Arial"/>
+                <a:cs typeface="Arial"/>
               </a:defRPr>
             </a:pPr>
             <a:r>
@@ -3186,16 +3444,23 @@
                 <a:solidFill>
                   <a:srgbClr val="152B3A"/>
                 </a:solidFill>
+                <a:latin typeface="Arial"/>
+                <a:ea typeface="Arial"/>
+                <a:cs typeface="Arial"/>
               </a:rPr>
               <a:t>Which claims fit the model?</a:t>
             </a:r>
           </a:p>
           <a:p xmlns:a="http://schemas.openxmlformats.org/drawingml/2006/main">
             <a:pPr>
+              <a:buNone/>
               <a:defRPr sz="2400" b="0">
                 <a:solidFill>
                   <a:srgbClr val="152B3A"/>
                 </a:solidFill>
+                <a:latin typeface="Arial"/>
+                <a:ea typeface="Arial"/>
+                <a:cs typeface="Arial"/>
               </a:defRPr>
             </a:pPr>
             <a:r>
@@ -3203,16 +3468,23 @@
                 <a:solidFill>
                   <a:srgbClr val="152B3A"/>
                 </a:solidFill>
+                <a:latin typeface="Arial"/>
+                <a:ea typeface="Arial"/>
+                <a:cs typeface="Arial"/>
               </a:rPr>
               <a:t>Which word needs changing?</a:t>
             </a:r>
           </a:p>
           <a:p xmlns:a="http://schemas.openxmlformats.org/drawingml/2006/main">
             <a:pPr>
+              <a:buNone/>
               <a:defRPr sz="2400" b="0">
                 <a:solidFill>
                   <a:srgbClr val="152B3A"/>
                 </a:solidFill>
+                <a:latin typeface="Arial"/>
+                <a:ea typeface="Arial"/>
+                <a:cs typeface="Arial"/>
               </a:defRPr>
             </a:pPr>
             <a:r>
@@ -3220,11 +3492,76 @@
                 <a:solidFill>
                   <a:srgbClr val="152B3A"/>
                 </a:solidFill>
+                <a:latin typeface="Arial"/>
+                <a:ea typeface="Arial"/>
+                <a:cs typeface="Arial"/>
               </a:rPr>
               <a:t>Show the action that supports you.</a:t>
             </a:r>
           </a:p>
         </p:txBody>
+      </p:sp>
+      <p:sp>
+        <p:nvSpPr>
+          <p:cNvPr id="14" name="">
+            <a:extLst xmlns:a="http://schemas.openxmlformats.org/drawingml/2006/main">
+              <a:ext uri="{FF2B5EF4-FFF2-40B4-BE49-F238E27FC236}">
+                <a16:creationId xmlns:a16="http://schemas.microsoft.com/office/drawing/2014/main" id="{1C20030F-BFF5-468E-9B09-602330BB281F}"/>
+              </a:ext>
+            </a:extLst>
+          </p:cNvPr>
+          <p:cNvSpPr>
+            <a:spLocks xmlns:a="http://schemas.openxmlformats.org/drawingml/2006/main" noGrp="1"/>
+          </p:cNvSpPr>
+          <p:nvPr/>
+        </p:nvSpPr>
+        <p:spPr>
+          <a:xfrm xmlns:a="http://schemas.openxmlformats.org/drawingml/2006/main">
+            <a:off x="609600" y="2886075"/>
+            <a:ext cx="5048250" cy="0"/>
+          </a:xfrm>
+          <a:prstGeom xmlns:a="http://schemas.openxmlformats.org/drawingml/2006/main" prst="line">
+            <a:avLst/>
+          </a:prstGeom>
+          <a:noFill xmlns:a="http://schemas.openxmlformats.org/drawingml/2006/main"/>
+          <a:ln xmlns:a="http://schemas.openxmlformats.org/drawingml/2006/main" w="28575">
+            <a:solidFill>
+              <a:srgbClr val="DCE7DD"/>
+            </a:solidFill>
+            <a:prstDash val="solid"/>
+          </a:ln>
+        </p:spPr>
+      </p:sp>
+      <p:sp>
+        <p:nvSpPr>
+          <p:cNvPr id="15" name="">
+            <a:extLst xmlns:a="http://schemas.openxmlformats.org/drawingml/2006/main">
+              <a:ext uri="{FF2B5EF4-FFF2-40B4-BE49-F238E27FC236}">
+                <a16:creationId xmlns:a16="http://schemas.microsoft.com/office/drawing/2014/main" id="{619A8A0A-71F2-4A42-A738-96744A2E16EB}"/>
+              </a:ext>
+            </a:extLst>
+          </p:cNvPr>
+          <p:cNvSpPr>
+            <a:spLocks xmlns:a="http://schemas.openxmlformats.org/drawingml/2006/main" noGrp="1"/>
+          </p:cNvSpPr>
+          <p:nvPr/>
+        </p:nvSpPr>
+        <p:spPr>
+          <a:xfrm xmlns:a="http://schemas.openxmlformats.org/drawingml/2006/main">
+            <a:off x="6572250" y="2886075"/>
+            <a:ext cx="5010150" cy="0"/>
+          </a:xfrm>
+          <a:prstGeom xmlns:a="http://schemas.openxmlformats.org/drawingml/2006/main" prst="line">
+            <a:avLst/>
+          </a:prstGeom>
+          <a:noFill xmlns:a="http://schemas.openxmlformats.org/drawingml/2006/main"/>
+          <a:ln xmlns:a="http://schemas.openxmlformats.org/drawingml/2006/main" w="28575">
+            <a:solidFill>
+              <a:srgbClr val="DCE7DD"/>
+            </a:solidFill>
+            <a:prstDash val="solid"/>
+          </a:ln>
+        </p:spPr>
       </p:sp>
     </p:spTree>
     <p:extLst>
@@ -3242,7 +3579,7 @@
     <p:bg>
       <p:bgPr>
         <a:solidFill xmlns:a="http://schemas.openxmlformats.org/drawingml/2006/main">
-          <a:srgbClr val="F5F1E8"/>
+          <a:srgbClr val="FBF9F3"/>
         </a:solidFill>
       </p:bgPr>
     </p:bg>
@@ -3271,8 +3608,8 @@
         </p:nvSpPr>
         <p:spPr>
           <a:xfrm xmlns:a="http://schemas.openxmlformats.org/drawingml/2006/main">
-            <a:off x="609600" y="552450"/>
-            <a:ext cx="781050" cy="57150"/>
+            <a:off x="609600" y="742950"/>
+            <a:ext cx="9906000" cy="38100"/>
           </a:xfrm>
           <a:prstGeom xmlns:a="http://schemas.openxmlformats.org/drawingml/2006/main" prst="rect">
             <a:avLst/>
@@ -3302,8 +3639,8 @@
         </p:nvSpPr>
         <p:spPr>
           <a:xfrm xmlns:a="http://schemas.openxmlformats.org/drawingml/2006/main">
-            <a:off x="609600" y="762000"/>
-            <a:ext cx="9334500" cy="285750"/>
+            <a:off x="609600" y="342900"/>
+            <a:ext cx="9334500" cy="266700"/>
           </a:xfrm>
           <a:prstGeom xmlns:a="http://schemas.openxmlformats.org/drawingml/2006/main" prst="rect">
             <a:avLst/>
@@ -3315,21 +3652,30 @@
           </a:ln>
         </p:spPr>
         <p:txBody>
-          <a:bodyPr xmlns:a="http://schemas.openxmlformats.org/drawingml/2006/main" lIns="0" tIns="0" rIns="0" bIns="0" anchor="ctr"/>
+          <a:bodyPr xmlns:a="http://schemas.openxmlformats.org/drawingml/2006/main" wrap="square" lIns="0" tIns="0" rIns="0" bIns="0" anchor="ctr">
+            <a:noAutofit/>
+          </a:bodyPr>
           <a:lstStyle xmlns:a="http://schemas.openxmlformats.org/drawingml/2006/main"/>
           <a:p xmlns:a="http://schemas.openxmlformats.org/drawingml/2006/main">
             <a:pPr>
-              <a:defRPr sz="1500" b="1">
+              <a:buNone/>
+              <a:defRPr sz="1425" b="1">
                 <a:solidFill>
                   <a:srgbClr val="28685E"/>
                 </a:solidFill>
+                <a:latin typeface="Arial"/>
+                <a:ea typeface="Arial"/>
+                <a:cs typeface="Arial"/>
               </a:defRPr>
             </a:pPr>
             <a:r>
-              <a:rPr sz="1500" b="1">
+              <a:rPr sz="1425" b="1">
                 <a:solidFill>
                   <a:srgbClr val="28685E"/>
                 </a:solidFill>
+                <a:latin typeface="Arial"/>
+                <a:ea typeface="Arial"/>
+                <a:cs typeface="Arial"/>
               </a:rPr>
               <a:t>MADE BY MATT  /  BUILD SCIENCE</a:t>
             </a:r>
@@ -3338,14 +3684,14 @@
       </p:sp>
       <p:pic>
         <p:nvPicPr>
-          <p:cNvPr id="14" name=""/>
+          <p:cNvPr id="16" name=""/>
           <p:cNvPicPr>
             <a:picLocks xmlns:a="http://schemas.openxmlformats.org/drawingml/2006/main" noChangeAspect="1"/>
           </p:cNvPicPr>
           <p:nvPr/>
         </p:nvPicPr>
         <p:blipFill>
-          <a:blip xmlns:r="http://schemas.openxmlformats.org/officeDocument/2006/relationships" xmlns:a="http://schemas.openxmlformats.org/drawingml/2006/main" r:embed="R8cf501224e3d4784"/>
+          <a:blip xmlns:r="http://schemas.openxmlformats.org/officeDocument/2006/relationships" xmlns:a="http://schemas.openxmlformats.org/drawingml/2006/main" r:embed="Rf6e88ba5aed340dc"/>
           <a:stretch xmlns:a="http://schemas.openxmlformats.org/drawingml/2006/main"/>
         </p:blipFill>
         <p:spPr>
@@ -3374,8 +3720,8 @@
         </p:nvSpPr>
         <p:spPr>
           <a:xfrm xmlns:a="http://schemas.openxmlformats.org/drawingml/2006/main">
-            <a:off x="609600" y="1352550"/>
-            <a:ext cx="10972800" cy="952500"/>
+            <a:off x="609600" y="1047750"/>
+            <a:ext cx="10972800" cy="895350"/>
           </a:xfrm>
           <a:prstGeom xmlns:a="http://schemas.openxmlformats.org/drawingml/2006/main" prst="rect">
             <a:avLst/>
@@ -3387,21 +3733,30 @@
           </a:ln>
         </p:spPr>
         <p:txBody>
-          <a:bodyPr xmlns:a="http://schemas.openxmlformats.org/drawingml/2006/main" lIns="0" tIns="0" rIns="0" bIns="0" anchor="ctr"/>
+          <a:bodyPr xmlns:a="http://schemas.openxmlformats.org/drawingml/2006/main" wrap="square" lIns="0" tIns="0" rIns="0" bIns="0" anchor="ctr">
+            <a:noAutofit/>
+          </a:bodyPr>
           <a:lstStyle xmlns:a="http://schemas.openxmlformats.org/drawingml/2006/main"/>
           <a:p xmlns:a="http://schemas.openxmlformats.org/drawingml/2006/main">
             <a:pPr>
-              <a:defRPr sz="3750" b="1">
+              <a:buNone/>
+              <a:defRPr sz="3600" b="1">
                 <a:solidFill>
                   <a:srgbClr val="152B3A"/>
                 </a:solidFill>
+                <a:latin typeface="Arial"/>
+                <a:ea typeface="Arial"/>
+                <a:cs typeface="Arial"/>
               </a:defRPr>
             </a:pPr>
             <a:r>
-              <a:rPr sz="3750" b="1">
+              <a:rPr sz="3600" b="1">
                 <a:solidFill>
                   <a:srgbClr val="152B3A"/>
                 </a:solidFill>
+                <a:latin typeface="Arial"/>
+                <a:ea typeface="Arial"/>
+                <a:cs typeface="Arial"/>
               </a:rPr>
               <a:t>Direct two moves and keep labels</a:t>
             </a:r>
@@ -3468,21 +3823,30 @@
           </a:ln>
         </p:spPr>
         <p:txBody>
-          <a:bodyPr xmlns:a="http://schemas.openxmlformats.org/drawingml/2006/main" lIns="0" tIns="0" rIns="0" bIns="0" anchor="ctr"/>
+          <a:bodyPr xmlns:a="http://schemas.openxmlformats.org/drawingml/2006/main" wrap="square" lIns="0" tIns="0" rIns="0" bIns="0" anchor="ctr">
+            <a:noAutofit/>
+          </a:bodyPr>
           <a:lstStyle xmlns:a="http://schemas.openxmlformats.org/drawingml/2006/main"/>
           <a:p xmlns:a="http://schemas.openxmlformats.org/drawingml/2006/main">
             <a:pPr>
-              <a:defRPr sz="1275" b="0">
+              <a:buNone/>
+              <a:defRPr sz="1200" b="0">
                 <a:solidFill>
                   <a:srgbClr val="50616B"/>
                 </a:solidFill>
+                <a:latin typeface="Arial"/>
+                <a:ea typeface="Arial"/>
+                <a:cs typeface="Arial"/>
               </a:defRPr>
             </a:pPr>
             <a:r>
-              <a:rPr sz="1275" b="0">
+              <a:rPr sz="1200" b="0">
                 <a:solidFill>
                   <a:srgbClr val="50616B"/>
                 </a:solidFill>
+                <a:latin typeface="Arial"/>
+                <a:ea typeface="Arial"/>
+                <a:cs typeface="Arial"/>
               </a:rPr>
               <a:t>AUTUMN 1  ·  WEEK 4  ·  LESSON A</a:t>
             </a:r>
@@ -3518,14 +3882,20 @@
           </a:ln>
         </p:spPr>
         <p:txBody>
-          <a:bodyPr xmlns:a="http://schemas.openxmlformats.org/drawingml/2006/main" lIns="0" tIns="0" rIns="0" bIns="0" anchor="ctr"/>
+          <a:bodyPr xmlns:a="http://schemas.openxmlformats.org/drawingml/2006/main" wrap="square" lIns="0" tIns="0" rIns="0" bIns="0" anchor="ctr">
+            <a:noAutofit/>
+          </a:bodyPr>
           <a:lstStyle xmlns:a="http://schemas.openxmlformats.org/drawingml/2006/main"/>
           <a:p xmlns:a="http://schemas.openxmlformats.org/drawingml/2006/main">
             <a:pPr>
+              <a:buNone/>
               <a:defRPr sz="1350" b="1">
                 <a:solidFill>
                   <a:srgbClr val="28685E"/>
                 </a:solidFill>
+                <a:latin typeface="Arial"/>
+                <a:ea typeface="Arial"/>
+                <a:cs typeface="Arial"/>
               </a:defRPr>
             </a:pPr>
             <a:r>
@@ -3533,6 +3903,9 @@
                 <a:solidFill>
                   <a:srgbClr val="28685E"/>
                 </a:solidFill>
+                <a:latin typeface="Arial"/>
+                <a:ea typeface="Arial"/>
+                <a:cs typeface="Arial"/>
               </a:rPr>
               <a:t>11</a:t>
             </a:r>
@@ -3555,8 +3928,8 @@
         </p:nvSpPr>
         <p:spPr>
           <a:xfrm xmlns:a="http://schemas.openxmlformats.org/drawingml/2006/main">
-            <a:off x="609600" y="2619375"/>
-            <a:ext cx="10972800" cy="714375"/>
+            <a:off x="609600" y="2305050"/>
+            <a:ext cx="10972800" cy="704850"/>
           </a:xfrm>
           <a:prstGeom xmlns:a="http://schemas.openxmlformats.org/drawingml/2006/main" prst="rect">
             <a:avLst/>
@@ -3568,14 +3941,20 @@
           </a:ln>
         </p:spPr>
         <p:txBody>
-          <a:bodyPr xmlns:a="http://schemas.openxmlformats.org/drawingml/2006/main" lIns="0" tIns="0" rIns="0" bIns="0" anchor="ctr"/>
+          <a:bodyPr xmlns:a="http://schemas.openxmlformats.org/drawingml/2006/main" wrap="square" lIns="0" tIns="0" rIns="0" bIns="0" anchor="ctr">
+            <a:noAutofit/>
+          </a:bodyPr>
           <a:lstStyle xmlns:a="http://schemas.openxmlformats.org/drawingml/2006/main"/>
           <a:p xmlns:a="http://schemas.openxmlformats.org/drawingml/2006/main">
             <a:pPr>
+              <a:buNone/>
               <a:defRPr sz="2550" b="0">
                 <a:solidFill>
                   <a:srgbClr val="152B3A"/>
                 </a:solidFill>
+                <a:latin typeface="Arial"/>
+                <a:ea typeface="Arial"/>
+                <a:cs typeface="Arial"/>
               </a:defRPr>
             </a:pPr>
             <a:r>
@@ -3583,6 +3962,9 @@
                 <a:solidFill>
                   <a:srgbClr val="152B3A"/>
                 </a:solidFill>
+                <a:latin typeface="Arial"/>
+                <a:ea typeface="Arial"/>
+                <a:cs typeface="Arial"/>
               </a:rPr>
               <a:t>Direct one bend and one active straighten.</a:t>
             </a:r>
@@ -3605,8 +3987,8 @@
         </p:nvSpPr>
         <p:spPr>
           <a:xfrm xmlns:a="http://schemas.openxmlformats.org/drawingml/2006/main">
-            <a:off x="609600" y="3409950"/>
-            <a:ext cx="10972800" cy="714375"/>
+            <a:off x="609600" y="3143250"/>
+            <a:ext cx="10972800" cy="704850"/>
           </a:xfrm>
           <a:prstGeom xmlns:a="http://schemas.openxmlformats.org/drawingml/2006/main" prst="rect">
             <a:avLst/>
@@ -3618,14 +4000,20 @@
           </a:ln>
         </p:spPr>
         <p:txBody>
-          <a:bodyPr xmlns:a="http://schemas.openxmlformats.org/drawingml/2006/main" lIns="0" tIns="0" rIns="0" bIns="0" anchor="ctr"/>
+          <a:bodyPr xmlns:a="http://schemas.openxmlformats.org/drawingml/2006/main" wrap="square" lIns="0" tIns="0" rIns="0" bIns="0" anchor="ctr">
+            <a:noAutofit/>
+          </a:bodyPr>
           <a:lstStyle xmlns:a="http://schemas.openxmlformats.org/drawingml/2006/main"/>
           <a:p xmlns:a="http://schemas.openxmlformats.org/drawingml/2006/main">
             <a:pPr>
+              <a:buNone/>
               <a:defRPr sz="2550" b="0">
                 <a:solidFill>
                   <a:srgbClr val="152B3A"/>
                 </a:solidFill>
+                <a:latin typeface="Arial"/>
+                <a:ea typeface="Arial"/>
+                <a:cs typeface="Arial"/>
               </a:defRPr>
             </a:pPr>
             <a:r>
@@ -3633,6 +4021,9 @@
                 <a:solidFill>
                   <a:srgbClr val="152B3A"/>
                 </a:solidFill>
+                <a:latin typeface="Arial"/>
+                <a:ea typeface="Arial"/>
+                <a:cs typeface="Arial"/>
               </a:rPr>
               <a:t>Place CONTRACTS and RELAXES labels.</a:t>
             </a:r>
@@ -3655,8 +4046,8 @@
         </p:nvSpPr>
         <p:spPr>
           <a:xfrm xmlns:a="http://schemas.openxmlformats.org/drawingml/2006/main">
-            <a:off x="609600" y="4200525"/>
-            <a:ext cx="10972800" cy="714375"/>
+            <a:off x="609600" y="3981450"/>
+            <a:ext cx="10972800" cy="704850"/>
           </a:xfrm>
           <a:prstGeom xmlns:a="http://schemas.openxmlformats.org/drawingml/2006/main" prst="rect">
             <a:avLst/>
@@ -3668,14 +4059,20 @@
           </a:ln>
         </p:spPr>
         <p:txBody>
-          <a:bodyPr xmlns:a="http://schemas.openxmlformats.org/drawingml/2006/main" lIns="0" tIns="0" rIns="0" bIns="0" anchor="ctr"/>
+          <a:bodyPr xmlns:a="http://schemas.openxmlformats.org/drawingml/2006/main" wrap="square" lIns="0" tIns="0" rIns="0" bIns="0" anchor="ctr">
+            <a:noAutofit/>
+          </a:bodyPr>
           <a:lstStyle xmlns:a="http://schemas.openxmlformats.org/drawingml/2006/main"/>
           <a:p xmlns:a="http://schemas.openxmlformats.org/drawingml/2006/main">
             <a:pPr>
+              <a:buNone/>
               <a:defRPr sz="2550" b="0">
                 <a:solidFill>
                   <a:srgbClr val="152B3A"/>
                 </a:solidFill>
+                <a:latin typeface="Arial"/>
+                <a:ea typeface="Arial"/>
+                <a:cs typeface="Arial"/>
               </a:defRPr>
             </a:pPr>
             <a:r>
@@ -3683,6 +4080,9 @@
                 <a:solidFill>
                   <a:srgbClr val="152B3A"/>
                 </a:solidFill>
+                <a:latin typeface="Arial"/>
+                <a:ea typeface="Arial"/>
+                <a:cs typeface="Arial"/>
               </a:rPr>
               <a:t>Check one swap and correct it if needed.</a:t>
             </a:r>
@@ -3705,8 +4105,8 @@
         </p:nvSpPr>
         <p:spPr>
           <a:xfrm xmlns:a="http://schemas.openxmlformats.org/drawingml/2006/main">
-            <a:off x="609600" y="4991100"/>
-            <a:ext cx="10972800" cy="714375"/>
+            <a:off x="609600" y="4819650"/>
+            <a:ext cx="10972800" cy="704850"/>
           </a:xfrm>
           <a:prstGeom xmlns:a="http://schemas.openxmlformats.org/drawingml/2006/main" prst="rect">
             <a:avLst/>
@@ -3718,21 +4118,30 @@
           </a:ln>
         </p:spPr>
         <p:txBody>
-          <a:bodyPr xmlns:a="http://schemas.openxmlformats.org/drawingml/2006/main" lIns="0" tIns="0" rIns="0" bIns="0" anchor="ctr"/>
+          <a:bodyPr xmlns:a="http://schemas.openxmlformats.org/drawingml/2006/main" wrap="square" lIns="0" tIns="0" rIns="0" bIns="0" anchor="ctr">
+            <a:noAutofit/>
+          </a:bodyPr>
           <a:lstStyle xmlns:a="http://schemas.openxmlformats.org/drawingml/2006/main"/>
           <a:p xmlns:a="http://schemas.openxmlformats.org/drawingml/2006/main">
             <a:pPr>
-              <a:defRPr sz="2550" b="0">
-                <a:solidFill>
-                  <a:srgbClr val="152B3A"/>
-                </a:solidFill>
+              <a:buNone/>
+              <a:defRPr sz="2550" b="1">
+                <a:solidFill>
+                  <a:srgbClr val="28685E"/>
+                </a:solidFill>
+                <a:latin typeface="Arial"/>
+                <a:ea typeface="Arial"/>
+                <a:cs typeface="Arial"/>
               </a:defRPr>
             </a:pPr>
             <a:r>
-              <a:rPr sz="2550" b="0">
-                <a:solidFill>
-                  <a:srgbClr val="152B3A"/>
-                </a:solidFill>
+              <a:rPr sz="2550" b="1">
+                <a:solidFill>
+                  <a:srgbClr val="28685E"/>
+                </a:solidFill>
+                <a:latin typeface="Arial"/>
+                <a:ea typeface="Arial"/>
+                <a:cs typeface="Arial"/>
               </a:rPr>
               <a:t>Keep the labels for Wednesday.</a:t>
             </a:r>
@@ -3755,7 +4164,7 @@
     <p:bg>
       <p:bgPr>
         <a:solidFill xmlns:a="http://schemas.openxmlformats.org/drawingml/2006/main">
-          <a:srgbClr val="F5F1E8"/>
+          <a:srgbClr val="FBF9F3"/>
         </a:solidFill>
       </p:bgPr>
     </p:bg>
@@ -3784,8 +4193,8 @@
         </p:nvSpPr>
         <p:spPr>
           <a:xfrm xmlns:a="http://schemas.openxmlformats.org/drawingml/2006/main">
-            <a:off x="609600" y="552450"/>
-            <a:ext cx="781050" cy="57150"/>
+            <a:off x="609600" y="742950"/>
+            <a:ext cx="9906000" cy="38100"/>
           </a:xfrm>
           <a:prstGeom xmlns:a="http://schemas.openxmlformats.org/drawingml/2006/main" prst="rect">
             <a:avLst/>
@@ -3815,8 +4224,8 @@
         </p:nvSpPr>
         <p:spPr>
           <a:xfrm xmlns:a="http://schemas.openxmlformats.org/drawingml/2006/main">
-            <a:off x="609600" y="762000"/>
-            <a:ext cx="9334500" cy="285750"/>
+            <a:off x="609600" y="342900"/>
+            <a:ext cx="9334500" cy="266700"/>
           </a:xfrm>
           <a:prstGeom xmlns:a="http://schemas.openxmlformats.org/drawingml/2006/main" prst="rect">
             <a:avLst/>
@@ -3828,21 +4237,30 @@
           </a:ln>
         </p:spPr>
         <p:txBody>
-          <a:bodyPr xmlns:a="http://schemas.openxmlformats.org/drawingml/2006/main" lIns="0" tIns="0" rIns="0" bIns="0" anchor="ctr"/>
+          <a:bodyPr xmlns:a="http://schemas.openxmlformats.org/drawingml/2006/main" wrap="square" lIns="0" tIns="0" rIns="0" bIns="0" anchor="ctr">
+            <a:noAutofit/>
+          </a:bodyPr>
           <a:lstStyle xmlns:a="http://schemas.openxmlformats.org/drawingml/2006/main"/>
           <a:p xmlns:a="http://schemas.openxmlformats.org/drawingml/2006/main">
             <a:pPr>
-              <a:defRPr sz="1500" b="1">
+              <a:buNone/>
+              <a:defRPr sz="1425" b="1">
                 <a:solidFill>
                   <a:srgbClr val="28685E"/>
                 </a:solidFill>
+                <a:latin typeface="Arial"/>
+                <a:ea typeface="Arial"/>
+                <a:cs typeface="Arial"/>
               </a:defRPr>
             </a:pPr>
             <a:r>
-              <a:rPr sz="1500" b="1">
+              <a:rPr sz="1425" b="1">
                 <a:solidFill>
                   <a:srgbClr val="28685E"/>
                 </a:solidFill>
+                <a:latin typeface="Arial"/>
+                <a:ea typeface="Arial"/>
+                <a:cs typeface="Arial"/>
               </a:rPr>
               <a:t>MADE BY MATT  /  BUILD SCIENCE</a:t>
             </a:r>
@@ -3851,14 +4269,14 @@
       </p:sp>
       <p:pic>
         <p:nvPicPr>
-          <p:cNvPr id="13" name=""/>
+          <p:cNvPr id="16" name=""/>
           <p:cNvPicPr>
             <a:picLocks xmlns:a="http://schemas.openxmlformats.org/drawingml/2006/main" noChangeAspect="1"/>
           </p:cNvPicPr>
           <p:nvPr/>
         </p:nvPicPr>
         <p:blipFill>
-          <a:blip xmlns:r="http://schemas.openxmlformats.org/officeDocument/2006/relationships" xmlns:a="http://schemas.openxmlformats.org/drawingml/2006/main" r:embed="R755ad130d89846e4"/>
+          <a:blip xmlns:r="http://schemas.openxmlformats.org/officeDocument/2006/relationships" xmlns:a="http://schemas.openxmlformats.org/drawingml/2006/main" r:embed="R435d701369dc4d80"/>
           <a:stretch xmlns:a="http://schemas.openxmlformats.org/drawingml/2006/main"/>
         </p:blipFill>
         <p:spPr>
@@ -3887,8 +4305,8 @@
         </p:nvSpPr>
         <p:spPr>
           <a:xfrm xmlns:a="http://schemas.openxmlformats.org/drawingml/2006/main">
-            <a:off x="609600" y="1352550"/>
-            <a:ext cx="10972800" cy="952500"/>
+            <a:off x="609600" y="1047750"/>
+            <a:ext cx="10972800" cy="895350"/>
           </a:xfrm>
           <a:prstGeom xmlns:a="http://schemas.openxmlformats.org/drawingml/2006/main" prst="rect">
             <a:avLst/>
@@ -3900,21 +4318,30 @@
           </a:ln>
         </p:spPr>
         <p:txBody>
-          <a:bodyPr xmlns:a="http://schemas.openxmlformats.org/drawingml/2006/main" lIns="0" tIns="0" rIns="0" bIns="0" anchor="ctr"/>
+          <a:bodyPr xmlns:a="http://schemas.openxmlformats.org/drawingml/2006/main" wrap="square" lIns="0" tIns="0" rIns="0" bIns="0" anchor="ctr">
+            <a:noAutofit/>
+          </a:bodyPr>
           <a:lstStyle xmlns:a="http://schemas.openxmlformats.org/drawingml/2006/main"/>
           <a:p xmlns:a="http://schemas.openxmlformats.org/drawingml/2006/main">
             <a:pPr>
-              <a:defRPr sz="3750" b="1">
+              <a:buNone/>
+              <a:defRPr sz="3600" b="1">
                 <a:solidFill>
                   <a:srgbClr val="152B3A"/>
                 </a:solidFill>
+                <a:latin typeface="Arial"/>
+                <a:ea typeface="Arial"/>
+                <a:cs typeface="Arial"/>
               </a:defRPr>
             </a:pPr>
             <a:r>
-              <a:rPr sz="3750" b="1">
+              <a:rPr sz="3600" b="1">
                 <a:solidFill>
                   <a:srgbClr val="152B3A"/>
                 </a:solidFill>
+                <a:latin typeface="Arial"/>
+                <a:ea typeface="Arial"/>
+                <a:cs typeface="Arial"/>
               </a:rPr>
               <a:t>Watch a bend and a straighten</a:t>
             </a:r>
@@ -3981,21 +4408,30 @@
           </a:ln>
         </p:spPr>
         <p:txBody>
-          <a:bodyPr xmlns:a="http://schemas.openxmlformats.org/drawingml/2006/main" lIns="0" tIns="0" rIns="0" bIns="0" anchor="ctr"/>
+          <a:bodyPr xmlns:a="http://schemas.openxmlformats.org/drawingml/2006/main" wrap="square" lIns="0" tIns="0" rIns="0" bIns="0" anchor="ctr">
+            <a:noAutofit/>
+          </a:bodyPr>
           <a:lstStyle xmlns:a="http://schemas.openxmlformats.org/drawingml/2006/main"/>
           <a:p xmlns:a="http://schemas.openxmlformats.org/drawingml/2006/main">
             <a:pPr>
-              <a:defRPr sz="1275" b="0">
+              <a:buNone/>
+              <a:defRPr sz="1200" b="0">
                 <a:solidFill>
                   <a:srgbClr val="50616B"/>
                 </a:solidFill>
+                <a:latin typeface="Arial"/>
+                <a:ea typeface="Arial"/>
+                <a:cs typeface="Arial"/>
               </a:defRPr>
             </a:pPr>
             <a:r>
-              <a:rPr sz="1275" b="0">
+              <a:rPr sz="1200" b="0">
                 <a:solidFill>
                   <a:srgbClr val="50616B"/>
                 </a:solidFill>
+                <a:latin typeface="Arial"/>
+                <a:ea typeface="Arial"/>
+                <a:cs typeface="Arial"/>
               </a:rPr>
               <a:t>AUTUMN 1  ·  WEEK 4  ·  LESSON A</a:t>
             </a:r>
@@ -4031,14 +4467,20 @@
           </a:ln>
         </p:spPr>
         <p:txBody>
-          <a:bodyPr xmlns:a="http://schemas.openxmlformats.org/drawingml/2006/main" lIns="0" tIns="0" rIns="0" bIns="0" anchor="ctr"/>
+          <a:bodyPr xmlns:a="http://schemas.openxmlformats.org/drawingml/2006/main" wrap="square" lIns="0" tIns="0" rIns="0" bIns="0" anchor="ctr">
+            <a:noAutofit/>
+          </a:bodyPr>
           <a:lstStyle xmlns:a="http://schemas.openxmlformats.org/drawingml/2006/main"/>
           <a:p xmlns:a="http://schemas.openxmlformats.org/drawingml/2006/main">
             <a:pPr>
+              <a:buNone/>
               <a:defRPr sz="1350" b="1">
                 <a:solidFill>
                   <a:srgbClr val="28685E"/>
                 </a:solidFill>
+                <a:latin typeface="Arial"/>
+                <a:ea typeface="Arial"/>
+                <a:cs typeface="Arial"/>
               </a:defRPr>
             </a:pPr>
             <a:r>
@@ -4046,6 +4488,9 @@
                 <a:solidFill>
                   <a:srgbClr val="28685E"/>
                 </a:solidFill>
+                <a:latin typeface="Arial"/>
+                <a:ea typeface="Arial"/>
+                <a:cs typeface="Arial"/>
               </a:rPr>
               <a:t>02</a:t>
             </a:r>
@@ -4068,8 +4513,8 @@
         </p:nvSpPr>
         <p:spPr>
           <a:xfrm xmlns:a="http://schemas.openxmlformats.org/drawingml/2006/main">
-            <a:off x="609600" y="2619375"/>
-            <a:ext cx="10972800" cy="781050"/>
+            <a:off x="609600" y="2305050"/>
+            <a:ext cx="7096125" cy="914400"/>
           </a:xfrm>
           <a:prstGeom xmlns:a="http://schemas.openxmlformats.org/drawingml/2006/main" prst="rect">
             <a:avLst/>
@@ -4081,14 +4526,20 @@
           </a:ln>
         </p:spPr>
         <p:txBody>
-          <a:bodyPr xmlns:a="http://schemas.openxmlformats.org/drawingml/2006/main" lIns="0" tIns="0" rIns="0" bIns="0" anchor="ctr"/>
+          <a:bodyPr xmlns:a="http://schemas.openxmlformats.org/drawingml/2006/main" wrap="square" lIns="0" tIns="0" rIns="0" bIns="0" anchor="ctr">
+            <a:noAutofit/>
+          </a:bodyPr>
           <a:lstStyle xmlns:a="http://schemas.openxmlformats.org/drawingml/2006/main"/>
           <a:p xmlns:a="http://schemas.openxmlformats.org/drawingml/2006/main">
             <a:pPr>
+              <a:buNone/>
               <a:defRPr sz="2550" b="0">
                 <a:solidFill>
                   <a:srgbClr val="152B3A"/>
                 </a:solidFill>
+                <a:latin typeface="Arial"/>
+                <a:ea typeface="Arial"/>
+                <a:cs typeface="Arial"/>
               </a:defRPr>
             </a:pPr>
             <a:r>
@@ -4096,6 +4547,9 @@
                 <a:solidFill>
                   <a:srgbClr val="152B3A"/>
                 </a:solidFill>
+                <a:latin typeface="Arial"/>
+                <a:ea typeface="Arial"/>
+                <a:cs typeface="Arial"/>
               </a:rPr>
               <a:t>Watch the adult’s card arm model.</a:t>
             </a:r>
@@ -4118,8 +4572,8 @@
         </p:nvSpPr>
         <p:spPr>
           <a:xfrm xmlns:a="http://schemas.openxmlformats.org/drawingml/2006/main">
-            <a:off x="609600" y="3476625"/>
-            <a:ext cx="10972800" cy="781050"/>
+            <a:off x="609600" y="3352800"/>
+            <a:ext cx="7096125" cy="914400"/>
           </a:xfrm>
           <a:prstGeom xmlns:a="http://schemas.openxmlformats.org/drawingml/2006/main" prst="rect">
             <a:avLst/>
@@ -4131,14 +4585,20 @@
           </a:ln>
         </p:spPr>
         <p:txBody>
-          <a:bodyPr xmlns:a="http://schemas.openxmlformats.org/drawingml/2006/main" lIns="0" tIns="0" rIns="0" bIns="0" anchor="ctr"/>
+          <a:bodyPr xmlns:a="http://schemas.openxmlformats.org/drawingml/2006/main" wrap="square" lIns="0" tIns="0" rIns="0" bIns="0" anchor="ctr">
+            <a:noAutofit/>
+          </a:bodyPr>
           <a:lstStyle xmlns:a="http://schemas.openxmlformats.org/drawingml/2006/main"/>
           <a:p xmlns:a="http://schemas.openxmlformats.org/drawingml/2006/main">
             <a:pPr>
+              <a:buNone/>
               <a:defRPr sz="2550" b="0">
                 <a:solidFill>
                   <a:srgbClr val="152B3A"/>
                 </a:solidFill>
+                <a:latin typeface="Arial"/>
+                <a:ea typeface="Arial"/>
+                <a:cs typeface="Arial"/>
               </a:defRPr>
             </a:pPr>
             <a:r>
@@ -4146,6 +4606,9 @@
                 <a:solidFill>
                   <a:srgbClr val="152B3A"/>
                 </a:solidFill>
+                <a:latin typeface="Arial"/>
+                <a:ea typeface="Arial"/>
+                <a:cs typeface="Arial"/>
               </a:rPr>
               <a:t>Which pull makes the model bend?</a:t>
             </a:r>
@@ -4168,8 +4631,8 @@
         </p:nvSpPr>
         <p:spPr>
           <a:xfrm xmlns:a="http://schemas.openxmlformats.org/drawingml/2006/main">
-            <a:off x="609600" y="4333875"/>
-            <a:ext cx="10972800" cy="781050"/>
+            <a:off x="609600" y="4400550"/>
+            <a:ext cx="7096125" cy="914400"/>
           </a:xfrm>
           <a:prstGeom xmlns:a="http://schemas.openxmlformats.org/drawingml/2006/main" prst="rect">
             <a:avLst/>
@@ -4181,27 +4644,58 @@
           </a:ln>
         </p:spPr>
         <p:txBody>
-          <a:bodyPr xmlns:a="http://schemas.openxmlformats.org/drawingml/2006/main" lIns="0" tIns="0" rIns="0" bIns="0" anchor="ctr"/>
+          <a:bodyPr xmlns:a="http://schemas.openxmlformats.org/drawingml/2006/main" wrap="square" lIns="0" tIns="0" rIns="0" bIns="0" anchor="ctr">
+            <a:noAutofit/>
+          </a:bodyPr>
           <a:lstStyle xmlns:a="http://schemas.openxmlformats.org/drawingml/2006/main"/>
           <a:p xmlns:a="http://schemas.openxmlformats.org/drawingml/2006/main">
             <a:pPr>
-              <a:defRPr sz="2550" b="0">
-                <a:solidFill>
-                  <a:srgbClr val="152B3A"/>
-                </a:solidFill>
+              <a:buNone/>
+              <a:defRPr sz="2550" b="1">
+                <a:solidFill>
+                  <a:srgbClr val="28685E"/>
+                </a:solidFill>
+                <a:latin typeface="Arial"/>
+                <a:ea typeface="Arial"/>
+                <a:cs typeface="Arial"/>
               </a:defRPr>
             </a:pPr>
             <a:r>
-              <a:rPr sz="2550" b="0">
-                <a:solidFill>
-                  <a:srgbClr val="152B3A"/>
-                </a:solidFill>
+              <a:rPr sz="2550" b="1">
+                <a:solidFill>
+                  <a:srgbClr val="28685E"/>
+                </a:solidFill>
+                <a:latin typeface="Arial"/>
+                <a:ea typeface="Arial"/>
+                <a:cs typeface="Arial"/>
               </a:rPr>
               <a:t>Which pull makes it straighten?</a:t>
             </a:r>
           </a:p>
         </p:txBody>
       </p:sp>
+      <p:pic>
+        <p:nvPicPr>
+          <p:cNvPr id="24" name=""/>
+          <p:cNvPicPr>
+            <a:picLocks xmlns:a="http://schemas.openxmlformats.org/drawingml/2006/main" noChangeAspect="1"/>
+          </p:cNvPicPr>
+          <p:nvPr/>
+        </p:nvPicPr>
+        <p:blipFill>
+          <a:blip xmlns:r="http://schemas.openxmlformats.org/officeDocument/2006/relationships" xmlns:a="http://schemas.openxmlformats.org/drawingml/2006/main" r:embed="R0e8a5b91281c46d5"/>
+          <a:stretch xmlns:a="http://schemas.openxmlformats.org/drawingml/2006/main"/>
+        </p:blipFill>
+        <p:spPr>
+          <a:xfrm xmlns:a="http://schemas.openxmlformats.org/drawingml/2006/main">
+            <a:off x="8429625" y="2971800"/>
+            <a:ext cx="2857500" cy="2143125"/>
+          </a:xfrm>
+          <a:prstGeom xmlns:a="http://schemas.openxmlformats.org/drawingml/2006/main" prst="rect">
+            <a:avLst/>
+          </a:prstGeom>
+        </p:spPr>
+      </p:pic>
     </p:spTree>
     <p:extLst>
       <p:ext uri="{BB962C8B-B14F-4D97-AF65-F5344CB8AC3E}">
@@ -4218,7 +4712,7 @@
     <p:bg>
       <p:bgPr>
         <a:solidFill xmlns:a="http://schemas.openxmlformats.org/drawingml/2006/main">
-          <a:srgbClr val="F5F1E8"/>
+          <a:srgbClr val="FBF9F3"/>
         </a:solidFill>
       </p:bgPr>
     </p:bg>
@@ -4247,8 +4741,8 @@
         </p:nvSpPr>
         <p:spPr>
           <a:xfrm xmlns:a="http://schemas.openxmlformats.org/drawingml/2006/main">
-            <a:off x="609600" y="552450"/>
-            <a:ext cx="781050" cy="57150"/>
+            <a:off x="609600" y="742950"/>
+            <a:ext cx="9906000" cy="38100"/>
           </a:xfrm>
           <a:prstGeom xmlns:a="http://schemas.openxmlformats.org/drawingml/2006/main" prst="rect">
             <a:avLst/>
@@ -4278,8 +4772,8 @@
         </p:nvSpPr>
         <p:spPr>
           <a:xfrm xmlns:a="http://schemas.openxmlformats.org/drawingml/2006/main">
-            <a:off x="609600" y="762000"/>
-            <a:ext cx="9334500" cy="285750"/>
+            <a:off x="609600" y="342900"/>
+            <a:ext cx="9334500" cy="266700"/>
           </a:xfrm>
           <a:prstGeom xmlns:a="http://schemas.openxmlformats.org/drawingml/2006/main" prst="rect">
             <a:avLst/>
@@ -4291,21 +4785,30 @@
           </a:ln>
         </p:spPr>
         <p:txBody>
-          <a:bodyPr xmlns:a="http://schemas.openxmlformats.org/drawingml/2006/main" lIns="0" tIns="0" rIns="0" bIns="0" anchor="ctr"/>
+          <a:bodyPr xmlns:a="http://schemas.openxmlformats.org/drawingml/2006/main" wrap="square" lIns="0" tIns="0" rIns="0" bIns="0" anchor="ctr">
+            <a:noAutofit/>
+          </a:bodyPr>
           <a:lstStyle xmlns:a="http://schemas.openxmlformats.org/drawingml/2006/main"/>
           <a:p xmlns:a="http://schemas.openxmlformats.org/drawingml/2006/main">
             <a:pPr>
-              <a:defRPr sz="1500" b="1">
+              <a:buNone/>
+              <a:defRPr sz="1425" b="1">
                 <a:solidFill>
                   <a:srgbClr val="28685E"/>
                 </a:solidFill>
+                <a:latin typeface="Arial"/>
+                <a:ea typeface="Arial"/>
+                <a:cs typeface="Arial"/>
               </a:defRPr>
             </a:pPr>
             <a:r>
-              <a:rPr sz="1500" b="1">
+              <a:rPr sz="1425" b="1">
                 <a:solidFill>
                   <a:srgbClr val="28685E"/>
                 </a:solidFill>
+                <a:latin typeface="Arial"/>
+                <a:ea typeface="Arial"/>
+                <a:cs typeface="Arial"/>
               </a:rPr>
               <a:t>MADE BY MATT  /  BUILD SCIENCE</a:t>
             </a:r>
@@ -4314,14 +4817,14 @@
       </p:sp>
       <p:pic>
         <p:nvPicPr>
-          <p:cNvPr id="13" name=""/>
+          <p:cNvPr id="15" name=""/>
           <p:cNvPicPr>
             <a:picLocks xmlns:a="http://schemas.openxmlformats.org/drawingml/2006/main" noChangeAspect="1"/>
           </p:cNvPicPr>
           <p:nvPr/>
         </p:nvPicPr>
         <p:blipFill>
-          <a:blip xmlns:r="http://schemas.openxmlformats.org/officeDocument/2006/relationships" xmlns:a="http://schemas.openxmlformats.org/drawingml/2006/main" r:embed="R8585e36ecc914701"/>
+          <a:blip xmlns:r="http://schemas.openxmlformats.org/officeDocument/2006/relationships" xmlns:a="http://schemas.openxmlformats.org/drawingml/2006/main" r:embed="R7d78a1d0a90245bb"/>
           <a:stretch xmlns:a="http://schemas.openxmlformats.org/drawingml/2006/main"/>
         </p:blipFill>
         <p:spPr>
@@ -4350,8 +4853,8 @@
         </p:nvSpPr>
         <p:spPr>
           <a:xfrm xmlns:a="http://schemas.openxmlformats.org/drawingml/2006/main">
-            <a:off x="609600" y="1352550"/>
-            <a:ext cx="10972800" cy="952500"/>
+            <a:off x="609600" y="1047750"/>
+            <a:ext cx="10972800" cy="895350"/>
           </a:xfrm>
           <a:prstGeom xmlns:a="http://schemas.openxmlformats.org/drawingml/2006/main" prst="rect">
             <a:avLst/>
@@ -4363,21 +4866,30 @@
           </a:ln>
         </p:spPr>
         <p:txBody>
-          <a:bodyPr xmlns:a="http://schemas.openxmlformats.org/drawingml/2006/main" lIns="0" tIns="0" rIns="0" bIns="0" anchor="ctr"/>
+          <a:bodyPr xmlns:a="http://schemas.openxmlformats.org/drawingml/2006/main" wrap="square" lIns="0" tIns="0" rIns="0" bIns="0" anchor="ctr">
+            <a:noAutofit/>
+          </a:bodyPr>
           <a:lstStyle xmlns:a="http://schemas.openxmlformats.org/drawingml/2006/main"/>
           <a:p xmlns:a="http://schemas.openxmlformats.org/drawingml/2006/main">
             <a:pPr>
-              <a:defRPr sz="3750" b="1">
+              <a:buNone/>
+              <a:defRPr sz="3600" b="1">
                 <a:solidFill>
                   <a:srgbClr val="152B3A"/>
                 </a:solidFill>
+                <a:latin typeface="Arial"/>
+                <a:ea typeface="Arial"/>
+                <a:cs typeface="Arial"/>
               </a:defRPr>
             </a:pPr>
             <a:r>
-              <a:rPr sz="3750" b="1">
+              <a:rPr sz="3600" b="1">
                 <a:solidFill>
                   <a:srgbClr val="152B3A"/>
                 </a:solidFill>
+                <a:latin typeface="Arial"/>
+                <a:ea typeface="Arial"/>
+                <a:cs typeface="Arial"/>
               </a:rPr>
               <a:t>Three things we will do</a:t>
             </a:r>
@@ -4444,21 +4956,30 @@
           </a:ln>
         </p:spPr>
         <p:txBody>
-          <a:bodyPr xmlns:a="http://schemas.openxmlformats.org/drawingml/2006/main" lIns="0" tIns="0" rIns="0" bIns="0" anchor="ctr"/>
+          <a:bodyPr xmlns:a="http://schemas.openxmlformats.org/drawingml/2006/main" wrap="square" lIns="0" tIns="0" rIns="0" bIns="0" anchor="ctr">
+            <a:noAutofit/>
+          </a:bodyPr>
           <a:lstStyle xmlns:a="http://schemas.openxmlformats.org/drawingml/2006/main"/>
           <a:p xmlns:a="http://schemas.openxmlformats.org/drawingml/2006/main">
             <a:pPr>
-              <a:defRPr sz="1275" b="0">
+              <a:buNone/>
+              <a:defRPr sz="1200" b="0">
                 <a:solidFill>
                   <a:srgbClr val="50616B"/>
                 </a:solidFill>
+                <a:latin typeface="Arial"/>
+                <a:ea typeface="Arial"/>
+                <a:cs typeface="Arial"/>
               </a:defRPr>
             </a:pPr>
             <a:r>
-              <a:rPr sz="1275" b="0">
+              <a:rPr sz="1200" b="0">
                 <a:solidFill>
                   <a:srgbClr val="50616B"/>
                 </a:solidFill>
+                <a:latin typeface="Arial"/>
+                <a:ea typeface="Arial"/>
+                <a:cs typeface="Arial"/>
               </a:rPr>
               <a:t>AUTUMN 1  ·  WEEK 4  ·  LESSON A</a:t>
             </a:r>
@@ -4494,14 +5015,20 @@
           </a:ln>
         </p:spPr>
         <p:txBody>
-          <a:bodyPr xmlns:a="http://schemas.openxmlformats.org/drawingml/2006/main" lIns="0" tIns="0" rIns="0" bIns="0" anchor="ctr"/>
+          <a:bodyPr xmlns:a="http://schemas.openxmlformats.org/drawingml/2006/main" wrap="square" lIns="0" tIns="0" rIns="0" bIns="0" anchor="ctr">
+            <a:noAutofit/>
+          </a:bodyPr>
           <a:lstStyle xmlns:a="http://schemas.openxmlformats.org/drawingml/2006/main"/>
           <a:p xmlns:a="http://schemas.openxmlformats.org/drawingml/2006/main">
             <a:pPr>
+              <a:buNone/>
               <a:defRPr sz="1350" b="1">
                 <a:solidFill>
                   <a:srgbClr val="28685E"/>
                 </a:solidFill>
+                <a:latin typeface="Arial"/>
+                <a:ea typeface="Arial"/>
+                <a:cs typeface="Arial"/>
               </a:defRPr>
             </a:pPr>
             <a:r>
@@ -4509,6 +5036,9 @@
                 <a:solidFill>
                   <a:srgbClr val="28685E"/>
                 </a:solidFill>
+                <a:latin typeface="Arial"/>
+                <a:ea typeface="Arial"/>
+                <a:cs typeface="Arial"/>
               </a:rPr>
               <a:t>03</a:t>
             </a:r>
@@ -4531,8 +5061,8 @@
         </p:nvSpPr>
         <p:spPr>
           <a:xfrm xmlns:a="http://schemas.openxmlformats.org/drawingml/2006/main">
-            <a:off x="609600" y="2619375"/>
-            <a:ext cx="10972800" cy="781050"/>
+            <a:off x="609600" y="2305050"/>
+            <a:ext cx="10972800" cy="914400"/>
           </a:xfrm>
           <a:prstGeom xmlns:a="http://schemas.openxmlformats.org/drawingml/2006/main" prst="rect">
             <a:avLst/>
@@ -4544,14 +5074,20 @@
           </a:ln>
         </p:spPr>
         <p:txBody>
-          <a:bodyPr xmlns:a="http://schemas.openxmlformats.org/drawingml/2006/main" lIns="0" tIns="0" rIns="0" bIns="0" anchor="ctr"/>
+          <a:bodyPr xmlns:a="http://schemas.openxmlformats.org/drawingml/2006/main" wrap="square" lIns="0" tIns="0" rIns="0" bIns="0" anchor="ctr">
+            <a:noAutofit/>
+          </a:bodyPr>
           <a:lstStyle xmlns:a="http://schemas.openxmlformats.org/drawingml/2006/main"/>
           <a:p xmlns:a="http://schemas.openxmlformats.org/drawingml/2006/main">
             <a:pPr>
+              <a:buNone/>
               <a:defRPr sz="2550" b="0">
                 <a:solidFill>
                   <a:srgbClr val="152B3A"/>
                 </a:solidFill>
+                <a:latin typeface="Arial"/>
+                <a:ea typeface="Arial"/>
+                <a:cs typeface="Arial"/>
               </a:defRPr>
             </a:pPr>
             <a:r>
@@ -4559,6 +5095,9 @@
                 <a:solidFill>
                   <a:srgbClr val="152B3A"/>
                 </a:solidFill>
+                <a:latin typeface="Arial"/>
+                <a:ea typeface="Arial"/>
+                <a:cs typeface="Arial"/>
               </a:rPr>
               <a:t>Meet the muscle pair.</a:t>
             </a:r>
@@ -4581,8 +5120,8 @@
         </p:nvSpPr>
         <p:spPr>
           <a:xfrm xmlns:a="http://schemas.openxmlformats.org/drawingml/2006/main">
-            <a:off x="609600" y="3476625"/>
-            <a:ext cx="10972800" cy="781050"/>
+            <a:off x="609600" y="3352800"/>
+            <a:ext cx="10972800" cy="914400"/>
           </a:xfrm>
           <a:prstGeom xmlns:a="http://schemas.openxmlformats.org/drawingml/2006/main" prst="rect">
             <a:avLst/>
@@ -4594,14 +5133,20 @@
           </a:ln>
         </p:spPr>
         <p:txBody>
-          <a:bodyPr xmlns:a="http://schemas.openxmlformats.org/drawingml/2006/main" lIns="0" tIns="0" rIns="0" bIns="0" anchor="ctr"/>
+          <a:bodyPr xmlns:a="http://schemas.openxmlformats.org/drawingml/2006/main" wrap="square" lIns="0" tIns="0" rIns="0" bIns="0" anchor="ctr">
+            <a:noAutofit/>
+          </a:bodyPr>
           <a:lstStyle xmlns:a="http://schemas.openxmlformats.org/drawingml/2006/main"/>
           <a:p xmlns:a="http://schemas.openxmlformats.org/drawingml/2006/main">
             <a:pPr>
+              <a:buNone/>
               <a:defRPr sz="2550" b="0">
                 <a:solidFill>
                   <a:srgbClr val="152B3A"/>
                 </a:solidFill>
+                <a:latin typeface="Arial"/>
+                <a:ea typeface="Arial"/>
+                <a:cs typeface="Arial"/>
               </a:defRPr>
             </a:pPr>
             <a:r>
@@ -4609,6 +5154,9 @@
                 <a:solidFill>
                   <a:srgbClr val="152B3A"/>
                 </a:solidFill>
+                <a:latin typeface="Arial"/>
+                <a:ea typeface="Arial"/>
+                <a:cs typeface="Arial"/>
               </a:rPr>
               <a:t>Compare a bend and a straighten.</a:t>
             </a:r>
@@ -4631,8 +5179,8 @@
         </p:nvSpPr>
         <p:spPr>
           <a:xfrm xmlns:a="http://schemas.openxmlformats.org/drawingml/2006/main">
-            <a:off x="609600" y="4333875"/>
-            <a:ext cx="10972800" cy="781050"/>
+            <a:off x="609600" y="4400550"/>
+            <a:ext cx="10972800" cy="914400"/>
           </a:xfrm>
           <a:prstGeom xmlns:a="http://schemas.openxmlformats.org/drawingml/2006/main" prst="rect">
             <a:avLst/>
@@ -4644,21 +5192,30 @@
           </a:ln>
         </p:spPr>
         <p:txBody>
-          <a:bodyPr xmlns:a="http://schemas.openxmlformats.org/drawingml/2006/main" lIns="0" tIns="0" rIns="0" bIns="0" anchor="ctr"/>
+          <a:bodyPr xmlns:a="http://schemas.openxmlformats.org/drawingml/2006/main" wrap="square" lIns="0" tIns="0" rIns="0" bIns="0" anchor="ctr">
+            <a:noAutofit/>
+          </a:bodyPr>
           <a:lstStyle xmlns:a="http://schemas.openxmlformats.org/drawingml/2006/main"/>
           <a:p xmlns:a="http://schemas.openxmlformats.org/drawingml/2006/main">
             <a:pPr>
-              <a:defRPr sz="2550" b="0">
-                <a:solidFill>
-                  <a:srgbClr val="152B3A"/>
-                </a:solidFill>
+              <a:buNone/>
+              <a:defRPr sz="2550" b="1">
+                <a:solidFill>
+                  <a:srgbClr val="28685E"/>
+                </a:solidFill>
+                <a:latin typeface="Arial"/>
+                <a:ea typeface="Arial"/>
+                <a:cs typeface="Arial"/>
               </a:defRPr>
             </a:pPr>
             <a:r>
-              <a:rPr sz="2550" b="0">
-                <a:solidFill>
-                  <a:srgbClr val="152B3A"/>
-                </a:solidFill>
+              <a:rPr sz="2550" b="1">
+                <a:solidFill>
+                  <a:srgbClr val="28685E"/>
+                </a:solidFill>
+                <a:latin typeface="Arial"/>
+                <a:ea typeface="Arial"/>
+                <a:cs typeface="Arial"/>
               </a:rPr>
               <a:t>Explain which muscle contracts.</a:t>
             </a:r>
@@ -4681,7 +5238,7 @@
     <p:bg>
       <p:bgPr>
         <a:solidFill xmlns:a="http://schemas.openxmlformats.org/drawingml/2006/main">
-          <a:srgbClr val="F5F1E8"/>
+          <a:srgbClr val="FBF9F3"/>
         </a:solidFill>
       </p:bgPr>
     </p:bg>
@@ -4710,8 +5267,8 @@
         </p:nvSpPr>
         <p:spPr>
           <a:xfrm xmlns:a="http://schemas.openxmlformats.org/drawingml/2006/main">
-            <a:off x="609600" y="552450"/>
-            <a:ext cx="781050" cy="57150"/>
+            <a:off x="609600" y="742950"/>
+            <a:ext cx="9906000" cy="38100"/>
           </a:xfrm>
           <a:prstGeom xmlns:a="http://schemas.openxmlformats.org/drawingml/2006/main" prst="rect">
             <a:avLst/>
@@ -4741,8 +5298,8 @@
         </p:nvSpPr>
         <p:spPr>
           <a:xfrm xmlns:a="http://schemas.openxmlformats.org/drawingml/2006/main">
-            <a:off x="609600" y="762000"/>
-            <a:ext cx="9334500" cy="285750"/>
+            <a:off x="609600" y="342900"/>
+            <a:ext cx="9334500" cy="266700"/>
           </a:xfrm>
           <a:prstGeom xmlns:a="http://schemas.openxmlformats.org/drawingml/2006/main" prst="rect">
             <a:avLst/>
@@ -4754,21 +5311,30 @@
           </a:ln>
         </p:spPr>
         <p:txBody>
-          <a:bodyPr xmlns:a="http://schemas.openxmlformats.org/drawingml/2006/main" lIns="0" tIns="0" rIns="0" bIns="0" anchor="ctr"/>
+          <a:bodyPr xmlns:a="http://schemas.openxmlformats.org/drawingml/2006/main" wrap="square" lIns="0" tIns="0" rIns="0" bIns="0" anchor="ctr">
+            <a:noAutofit/>
+          </a:bodyPr>
           <a:lstStyle xmlns:a="http://schemas.openxmlformats.org/drawingml/2006/main"/>
           <a:p xmlns:a="http://schemas.openxmlformats.org/drawingml/2006/main">
             <a:pPr>
-              <a:defRPr sz="1500" b="1">
+              <a:buNone/>
+              <a:defRPr sz="1425" b="1">
                 <a:solidFill>
                   <a:srgbClr val="28685E"/>
                 </a:solidFill>
+                <a:latin typeface="Arial"/>
+                <a:ea typeface="Arial"/>
+                <a:cs typeface="Arial"/>
               </a:defRPr>
             </a:pPr>
             <a:r>
-              <a:rPr sz="1500" b="1">
+              <a:rPr sz="1425" b="1">
                 <a:solidFill>
                   <a:srgbClr val="28685E"/>
                 </a:solidFill>
+                <a:latin typeface="Arial"/>
+                <a:ea typeface="Arial"/>
+                <a:cs typeface="Arial"/>
               </a:rPr>
               <a:t>MADE BY MATT  /  BUILD SCIENCE</a:t>
             </a:r>
@@ -4777,14 +5343,14 @@
       </p:sp>
       <p:pic>
         <p:nvPicPr>
-          <p:cNvPr id="19" name=""/>
+          <p:cNvPr id="21" name=""/>
           <p:cNvPicPr>
             <a:picLocks xmlns:a="http://schemas.openxmlformats.org/drawingml/2006/main" noChangeAspect="1"/>
           </p:cNvPicPr>
           <p:nvPr/>
         </p:nvPicPr>
         <p:blipFill>
-          <a:blip xmlns:r="http://schemas.openxmlformats.org/officeDocument/2006/relationships" xmlns:a="http://schemas.openxmlformats.org/drawingml/2006/main" r:embed="R8fec9a4fca1d4054"/>
+          <a:blip xmlns:r="http://schemas.openxmlformats.org/officeDocument/2006/relationships" xmlns:a="http://schemas.openxmlformats.org/drawingml/2006/main" r:embed="R3dcf876dfd0c4361"/>
           <a:stretch xmlns:a="http://schemas.openxmlformats.org/drawingml/2006/main"/>
         </p:blipFill>
         <p:spPr>
@@ -4813,8 +5379,8 @@
         </p:nvSpPr>
         <p:spPr>
           <a:xfrm xmlns:a="http://schemas.openxmlformats.org/drawingml/2006/main">
-            <a:off x="609600" y="1352550"/>
-            <a:ext cx="10972800" cy="952500"/>
+            <a:off x="609600" y="1047750"/>
+            <a:ext cx="10972800" cy="895350"/>
           </a:xfrm>
           <a:prstGeom xmlns:a="http://schemas.openxmlformats.org/drawingml/2006/main" prst="rect">
             <a:avLst/>
@@ -4826,21 +5392,30 @@
           </a:ln>
         </p:spPr>
         <p:txBody>
-          <a:bodyPr xmlns:a="http://schemas.openxmlformats.org/drawingml/2006/main" lIns="0" tIns="0" rIns="0" bIns="0" anchor="ctr"/>
+          <a:bodyPr xmlns:a="http://schemas.openxmlformats.org/drawingml/2006/main" wrap="square" lIns="0" tIns="0" rIns="0" bIns="0" anchor="ctr">
+            <a:noAutofit/>
+          </a:bodyPr>
           <a:lstStyle xmlns:a="http://schemas.openxmlformats.org/drawingml/2006/main"/>
           <a:p xmlns:a="http://schemas.openxmlformats.org/drawingml/2006/main">
             <a:pPr>
-              <a:defRPr sz="3750" b="1">
+              <a:buNone/>
+              <a:defRPr sz="3600" b="1">
                 <a:solidFill>
                   <a:srgbClr val="152B3A"/>
                 </a:solidFill>
+                <a:latin typeface="Arial"/>
+                <a:ea typeface="Arial"/>
+                <a:cs typeface="Arial"/>
               </a:defRPr>
             </a:pPr>
             <a:r>
-              <a:rPr sz="3750" b="1">
+              <a:rPr sz="3600" b="1">
                 <a:solidFill>
                   <a:srgbClr val="152B3A"/>
                 </a:solidFill>
+                <a:latin typeface="Arial"/>
+                <a:ea typeface="Arial"/>
+                <a:cs typeface="Arial"/>
               </a:rPr>
               <a:t>A model helps us see a pull</a:t>
             </a:r>
@@ -4907,21 +5482,30 @@
           </a:ln>
         </p:spPr>
         <p:txBody>
-          <a:bodyPr xmlns:a="http://schemas.openxmlformats.org/drawingml/2006/main" lIns="0" tIns="0" rIns="0" bIns="0" anchor="ctr"/>
+          <a:bodyPr xmlns:a="http://schemas.openxmlformats.org/drawingml/2006/main" wrap="square" lIns="0" tIns="0" rIns="0" bIns="0" anchor="ctr">
+            <a:noAutofit/>
+          </a:bodyPr>
           <a:lstStyle xmlns:a="http://schemas.openxmlformats.org/drawingml/2006/main"/>
           <a:p xmlns:a="http://schemas.openxmlformats.org/drawingml/2006/main">
             <a:pPr>
-              <a:defRPr sz="1275" b="0">
+              <a:buNone/>
+              <a:defRPr sz="1200" b="0">
                 <a:solidFill>
                   <a:srgbClr val="50616B"/>
                 </a:solidFill>
+                <a:latin typeface="Arial"/>
+                <a:ea typeface="Arial"/>
+                <a:cs typeface="Arial"/>
               </a:defRPr>
             </a:pPr>
             <a:r>
-              <a:rPr sz="1275" b="0">
+              <a:rPr sz="1200" b="0">
                 <a:solidFill>
                   <a:srgbClr val="50616B"/>
                 </a:solidFill>
+                <a:latin typeface="Arial"/>
+                <a:ea typeface="Arial"/>
+                <a:cs typeface="Arial"/>
               </a:rPr>
               <a:t>AUTUMN 1  ·  WEEK 4  ·  LESSON A</a:t>
             </a:r>
@@ -4957,14 +5541,20 @@
           </a:ln>
         </p:spPr>
         <p:txBody>
-          <a:bodyPr xmlns:a="http://schemas.openxmlformats.org/drawingml/2006/main" lIns="0" tIns="0" rIns="0" bIns="0" anchor="ctr"/>
+          <a:bodyPr xmlns:a="http://schemas.openxmlformats.org/drawingml/2006/main" wrap="square" lIns="0" tIns="0" rIns="0" bIns="0" anchor="ctr">
+            <a:noAutofit/>
+          </a:bodyPr>
           <a:lstStyle xmlns:a="http://schemas.openxmlformats.org/drawingml/2006/main"/>
           <a:p xmlns:a="http://schemas.openxmlformats.org/drawingml/2006/main">
             <a:pPr>
+              <a:buNone/>
               <a:defRPr sz="1350" b="1">
                 <a:solidFill>
                   <a:srgbClr val="28685E"/>
                 </a:solidFill>
+                <a:latin typeface="Arial"/>
+                <a:ea typeface="Arial"/>
+                <a:cs typeface="Arial"/>
               </a:defRPr>
             </a:pPr>
             <a:r>
@@ -4972,6 +5562,9 @@
                 <a:solidFill>
                   <a:srgbClr val="28685E"/>
                 </a:solidFill>
+                <a:latin typeface="Arial"/>
+                <a:ea typeface="Arial"/>
+                <a:cs typeface="Arial"/>
               </a:rPr>
               <a:t>04</a:t>
             </a:r>
@@ -5100,7 +5693,7 @@
             <a:avLst/>
           </a:prstGeom>
           <a:solidFill xmlns:a="http://schemas.openxmlformats.org/drawingml/2006/main">
-            <a:srgbClr val="4E7A9B"/>
+            <a:srgbClr val="28685E"/>
           </a:solidFill>
           <a:ln xmlns:a="http://schemas.openxmlformats.org/drawingml/2006/main" w="19050">
             <a:solidFill>
@@ -5143,6 +5736,7 @@
           <a:lstStyle xmlns:a="http://schemas.openxmlformats.org/drawingml/2006/main"/>
           <a:p xmlns:a="http://schemas.openxmlformats.org/drawingml/2006/main">
             <a:pPr>
+              <a:buNone/>
               <a:defRPr sz="1875" b="1">
                 <a:solidFill>
                   <a:srgbClr val="152B3A"/>
@@ -5193,6 +5787,7 @@
           <a:lstStyle xmlns:a="http://schemas.openxmlformats.org/drawingml/2006/main"/>
           <a:p xmlns:a="http://schemas.openxmlformats.org/drawingml/2006/main">
             <a:pPr>
+              <a:buNone/>
               <a:defRPr sz="1875" b="1">
                 <a:solidFill>
                   <a:srgbClr val="152B3A"/>
@@ -5243,6 +5838,7 @@
           <a:lstStyle xmlns:a="http://schemas.openxmlformats.org/drawingml/2006/main"/>
           <a:p xmlns:a="http://schemas.openxmlformats.org/drawingml/2006/main">
             <a:pPr>
+              <a:buNone/>
               <a:defRPr sz="1875" b="1">
                 <a:solidFill>
                   <a:srgbClr val="152B3A"/>
@@ -5276,8 +5872,8 @@
         </p:nvSpPr>
         <p:spPr>
           <a:xfrm xmlns:a="http://schemas.openxmlformats.org/drawingml/2006/main">
-            <a:off x="6667500" y="2714625"/>
-            <a:ext cx="4857750" cy="1762125"/>
+            <a:off x="6667500" y="2533650"/>
+            <a:ext cx="4762500" cy="1809750"/>
           </a:xfrm>
           <a:prstGeom xmlns:a="http://schemas.openxmlformats.org/drawingml/2006/main" prst="rect">
             <a:avLst/>
@@ -5289,21 +5885,30 @@
           </a:ln>
         </p:spPr>
         <p:txBody>
-          <a:bodyPr xmlns:a="http://schemas.openxmlformats.org/drawingml/2006/main" lIns="0" tIns="0" rIns="0" bIns="0" anchor="ctr"/>
+          <a:bodyPr xmlns:a="http://schemas.openxmlformats.org/drawingml/2006/main" wrap="square" lIns="0" tIns="0" rIns="0" bIns="0" anchor="ctr">
+            <a:noAutofit/>
+          </a:bodyPr>
           <a:lstStyle xmlns:a="http://schemas.openxmlformats.org/drawingml/2006/main"/>
           <a:p xmlns:a="http://schemas.openxmlformats.org/drawingml/2006/main">
             <a:pPr>
-              <a:defRPr sz="2550" b="1">
+              <a:buNone/>
+              <a:defRPr sz="2475" b="1">
                 <a:solidFill>
                   <a:srgbClr val="152B3A"/>
                 </a:solidFill>
+                <a:latin typeface="Arial"/>
+                <a:ea typeface="Arial"/>
+                <a:cs typeface="Arial"/>
               </a:defRPr>
             </a:pPr>
             <a:r>
-              <a:rPr sz="2550" b="1">
+              <a:rPr sz="2475" b="1">
                 <a:solidFill>
                   <a:srgbClr val="152B3A"/>
                 </a:solidFill>
+                <a:latin typeface="Arial"/>
+                <a:ea typeface="Arial"/>
+                <a:cs typeface="Arial"/>
               </a:rPr>
               <a:t>Card represents bones. The join represents an elbow.</a:t>
             </a:r>
@@ -5326,8 +5931,8 @@
         </p:nvSpPr>
         <p:spPr>
           <a:xfrm xmlns:a="http://schemas.openxmlformats.org/drawingml/2006/main">
-            <a:off x="6667500" y="4714875"/>
-            <a:ext cx="4857750" cy="1000125"/>
+            <a:off x="6667500" y="4629150"/>
+            <a:ext cx="4762500" cy="1162050"/>
           </a:xfrm>
           <a:prstGeom xmlns:a="http://schemas.openxmlformats.org/drawingml/2006/main" prst="rect">
             <a:avLst/>
@@ -5339,14 +5944,20 @@
           </a:ln>
         </p:spPr>
         <p:txBody>
-          <a:bodyPr xmlns:a="http://schemas.openxmlformats.org/drawingml/2006/main" lIns="0" tIns="0" rIns="0" bIns="0" anchor="ctr"/>
+          <a:bodyPr xmlns:a="http://schemas.openxmlformats.org/drawingml/2006/main" wrap="square" lIns="0" tIns="0" rIns="0" bIns="0" anchor="ctr">
+            <a:noAutofit/>
+          </a:bodyPr>
           <a:lstStyle xmlns:a="http://schemas.openxmlformats.org/drawingml/2006/main"/>
           <a:p xmlns:a="http://schemas.openxmlformats.org/drawingml/2006/main">
             <a:pPr>
+              <a:buNone/>
               <a:defRPr sz="2175" b="0">
                 <a:solidFill>
                   <a:srgbClr val="28685E"/>
                 </a:solidFill>
+                <a:latin typeface="Arial"/>
+                <a:ea typeface="Arial"/>
+                <a:cs typeface="Arial"/>
               </a:defRPr>
             </a:pPr>
             <a:r>
@@ -5354,6 +5965,9 @@
                 <a:solidFill>
                   <a:srgbClr val="28685E"/>
                 </a:solidFill>
+                <a:latin typeface="Arial"/>
+                <a:ea typeface="Arial"/>
+                <a:cs typeface="Arial"/>
               </a:rPr>
               <a:t>Loose string represents a muscle pull; it does not contract itself.</a:t>
             </a:r>
@@ -5376,7 +5990,7 @@
     <p:bg>
       <p:bgPr>
         <a:solidFill xmlns:a="http://schemas.openxmlformats.org/drawingml/2006/main">
-          <a:srgbClr val="F5F1E8"/>
+          <a:srgbClr val="FBF9F3"/>
         </a:solidFill>
       </p:bgPr>
     </p:bg>
@@ -5405,8 +6019,8 @@
         </p:nvSpPr>
         <p:spPr>
           <a:xfrm xmlns:a="http://schemas.openxmlformats.org/drawingml/2006/main">
-            <a:off x="609600" y="552450"/>
-            <a:ext cx="781050" cy="57150"/>
+            <a:off x="609600" y="742950"/>
+            <a:ext cx="9906000" cy="38100"/>
           </a:xfrm>
           <a:prstGeom xmlns:a="http://schemas.openxmlformats.org/drawingml/2006/main" prst="rect">
             <a:avLst/>
@@ -5436,8 +6050,8 @@
         </p:nvSpPr>
         <p:spPr>
           <a:xfrm xmlns:a="http://schemas.openxmlformats.org/drawingml/2006/main">
-            <a:off x="609600" y="762000"/>
-            <a:ext cx="9334500" cy="285750"/>
+            <a:off x="609600" y="342900"/>
+            <a:ext cx="9334500" cy="266700"/>
           </a:xfrm>
           <a:prstGeom xmlns:a="http://schemas.openxmlformats.org/drawingml/2006/main" prst="rect">
             <a:avLst/>
@@ -5449,21 +6063,30 @@
           </a:ln>
         </p:spPr>
         <p:txBody>
-          <a:bodyPr xmlns:a="http://schemas.openxmlformats.org/drawingml/2006/main" lIns="0" tIns="0" rIns="0" bIns="0" anchor="ctr"/>
+          <a:bodyPr xmlns:a="http://schemas.openxmlformats.org/drawingml/2006/main" wrap="square" lIns="0" tIns="0" rIns="0" bIns="0" anchor="ctr">
+            <a:noAutofit/>
+          </a:bodyPr>
           <a:lstStyle xmlns:a="http://schemas.openxmlformats.org/drawingml/2006/main"/>
           <a:p xmlns:a="http://schemas.openxmlformats.org/drawingml/2006/main">
             <a:pPr>
-              <a:defRPr sz="1500" b="1">
+              <a:buNone/>
+              <a:defRPr sz="1425" b="1">
                 <a:solidFill>
                   <a:srgbClr val="28685E"/>
                 </a:solidFill>
+                <a:latin typeface="Arial"/>
+                <a:ea typeface="Arial"/>
+                <a:cs typeface="Arial"/>
               </a:defRPr>
             </a:pPr>
             <a:r>
-              <a:rPr sz="1500" b="1">
+              <a:rPr sz="1425" b="1">
                 <a:solidFill>
                   <a:srgbClr val="28685E"/>
                 </a:solidFill>
+                <a:latin typeface="Arial"/>
+                <a:ea typeface="Arial"/>
+                <a:cs typeface="Arial"/>
               </a:rPr>
               <a:t>MADE BY MATT  /  BUILD SCIENCE</a:t>
             </a:r>
@@ -5472,14 +6095,14 @@
       </p:sp>
       <p:pic>
         <p:nvPicPr>
-          <p:cNvPr id="14" name=""/>
+          <p:cNvPr id="18" name=""/>
           <p:cNvPicPr>
             <a:picLocks xmlns:a="http://schemas.openxmlformats.org/drawingml/2006/main" noChangeAspect="1"/>
           </p:cNvPicPr>
           <p:nvPr/>
         </p:nvPicPr>
         <p:blipFill>
-          <a:blip xmlns:r="http://schemas.openxmlformats.org/officeDocument/2006/relationships" xmlns:a="http://schemas.openxmlformats.org/drawingml/2006/main" r:embed="Ra1736b50f2244bb4"/>
+          <a:blip xmlns:r="http://schemas.openxmlformats.org/officeDocument/2006/relationships" xmlns:a="http://schemas.openxmlformats.org/drawingml/2006/main" r:embed="R8ff467a9d4d540ff"/>
           <a:stretch xmlns:a="http://schemas.openxmlformats.org/drawingml/2006/main"/>
         </p:blipFill>
         <p:spPr>
@@ -5508,8 +6131,8 @@
         </p:nvSpPr>
         <p:spPr>
           <a:xfrm xmlns:a="http://schemas.openxmlformats.org/drawingml/2006/main">
-            <a:off x="609600" y="1352550"/>
-            <a:ext cx="10972800" cy="952500"/>
+            <a:off x="609600" y="1047750"/>
+            <a:ext cx="10972800" cy="895350"/>
           </a:xfrm>
           <a:prstGeom xmlns:a="http://schemas.openxmlformats.org/drawingml/2006/main" prst="rect">
             <a:avLst/>
@@ -5521,21 +6144,30 @@
           </a:ln>
         </p:spPr>
         <p:txBody>
-          <a:bodyPr xmlns:a="http://schemas.openxmlformats.org/drawingml/2006/main" lIns="0" tIns="0" rIns="0" bIns="0" anchor="ctr"/>
+          <a:bodyPr xmlns:a="http://schemas.openxmlformats.org/drawingml/2006/main" wrap="square" lIns="0" tIns="0" rIns="0" bIns="0" anchor="ctr">
+            <a:noAutofit/>
+          </a:bodyPr>
           <a:lstStyle xmlns:a="http://schemas.openxmlformats.org/drawingml/2006/main"/>
           <a:p xmlns:a="http://schemas.openxmlformats.org/drawingml/2006/main">
             <a:pPr>
-              <a:defRPr sz="3750" b="1">
+              <a:buNone/>
+              <a:defRPr sz="3600" b="1">
                 <a:solidFill>
                   <a:srgbClr val="152B3A"/>
                 </a:solidFill>
+                <a:latin typeface="Arial"/>
+                <a:ea typeface="Arial"/>
+                <a:cs typeface="Arial"/>
               </a:defRPr>
             </a:pPr>
             <a:r>
-              <a:rPr sz="3750" b="1">
+              <a:rPr sz="3600" b="1">
                 <a:solidFill>
                   <a:srgbClr val="152B3A"/>
                 </a:solidFill>
+                <a:latin typeface="Arial"/>
+                <a:ea typeface="Arial"/>
+                <a:cs typeface="Arial"/>
               </a:rPr>
               <a:t>The body has a working pair</a:t>
             </a:r>
@@ -5602,21 +6234,30 @@
           </a:ln>
         </p:spPr>
         <p:txBody>
-          <a:bodyPr xmlns:a="http://schemas.openxmlformats.org/drawingml/2006/main" lIns="0" tIns="0" rIns="0" bIns="0" anchor="ctr"/>
+          <a:bodyPr xmlns:a="http://schemas.openxmlformats.org/drawingml/2006/main" wrap="square" lIns="0" tIns="0" rIns="0" bIns="0" anchor="ctr">
+            <a:noAutofit/>
+          </a:bodyPr>
           <a:lstStyle xmlns:a="http://schemas.openxmlformats.org/drawingml/2006/main"/>
           <a:p xmlns:a="http://schemas.openxmlformats.org/drawingml/2006/main">
             <a:pPr>
-              <a:defRPr sz="1275" b="0">
+              <a:buNone/>
+              <a:defRPr sz="1200" b="0">
                 <a:solidFill>
                   <a:srgbClr val="50616B"/>
                 </a:solidFill>
+                <a:latin typeface="Arial"/>
+                <a:ea typeface="Arial"/>
+                <a:cs typeface="Arial"/>
               </a:defRPr>
             </a:pPr>
             <a:r>
-              <a:rPr sz="1275" b="0">
+              <a:rPr sz="1200" b="0">
                 <a:solidFill>
                   <a:srgbClr val="50616B"/>
                 </a:solidFill>
+                <a:latin typeface="Arial"/>
+                <a:ea typeface="Arial"/>
+                <a:cs typeface="Arial"/>
               </a:rPr>
               <a:t>AUTUMN 1  ·  WEEK 4  ·  LESSON A</a:t>
             </a:r>
@@ -5652,14 +6293,20 @@
           </a:ln>
         </p:spPr>
         <p:txBody>
-          <a:bodyPr xmlns:a="http://schemas.openxmlformats.org/drawingml/2006/main" lIns="0" tIns="0" rIns="0" bIns="0" anchor="ctr"/>
+          <a:bodyPr xmlns:a="http://schemas.openxmlformats.org/drawingml/2006/main" wrap="square" lIns="0" tIns="0" rIns="0" bIns="0" anchor="ctr">
+            <a:noAutofit/>
+          </a:bodyPr>
           <a:lstStyle xmlns:a="http://schemas.openxmlformats.org/drawingml/2006/main"/>
           <a:p xmlns:a="http://schemas.openxmlformats.org/drawingml/2006/main">
             <a:pPr>
+              <a:buNone/>
               <a:defRPr sz="1350" b="1">
                 <a:solidFill>
                   <a:srgbClr val="28685E"/>
                 </a:solidFill>
+                <a:latin typeface="Arial"/>
+                <a:ea typeface="Arial"/>
+                <a:cs typeface="Arial"/>
               </a:defRPr>
             </a:pPr>
             <a:r>
@@ -5667,6 +6314,9 @@
                 <a:solidFill>
                   <a:srgbClr val="28685E"/>
                 </a:solidFill>
+                <a:latin typeface="Arial"/>
+                <a:ea typeface="Arial"/>
+                <a:cs typeface="Arial"/>
               </a:rPr>
               <a:t>05</a:t>
             </a:r>
@@ -5689,8 +6339,8 @@
         </p:nvSpPr>
         <p:spPr>
           <a:xfrm xmlns:a="http://schemas.openxmlformats.org/drawingml/2006/main">
-            <a:off x="609600" y="2619375"/>
-            <a:ext cx="4953000" cy="428625"/>
+            <a:off x="609600" y="2257425"/>
+            <a:ext cx="5143500" cy="533400"/>
           </a:xfrm>
           <a:prstGeom xmlns:a="http://schemas.openxmlformats.org/drawingml/2006/main" prst="rect">
             <a:avLst/>
@@ -5702,21 +6352,30 @@
           </a:ln>
         </p:spPr>
         <p:txBody>
-          <a:bodyPr xmlns:a="http://schemas.openxmlformats.org/drawingml/2006/main" lIns="0" tIns="0" rIns="0" bIns="0" anchor="ctr"/>
+          <a:bodyPr xmlns:a="http://schemas.openxmlformats.org/drawingml/2006/main" wrap="square" lIns="0" tIns="0" rIns="0" bIns="0" anchor="ctr">
+            <a:noAutofit/>
+          </a:bodyPr>
           <a:lstStyle xmlns:a="http://schemas.openxmlformats.org/drawingml/2006/main"/>
           <a:p xmlns:a="http://schemas.openxmlformats.org/drawingml/2006/main">
             <a:pPr>
-              <a:defRPr sz="2025" b="1">
+              <a:buNone/>
+              <a:defRPr sz="2100" b="1">
                 <a:solidFill>
                   <a:srgbClr val="28685E"/>
                 </a:solidFill>
+                <a:latin typeface="Arial"/>
+                <a:ea typeface="Arial"/>
+                <a:cs typeface="Arial"/>
               </a:defRPr>
             </a:pPr>
             <a:r>
-              <a:rPr sz="2025" b="1">
+              <a:rPr sz="2100" b="1">
                 <a:solidFill>
                   <a:srgbClr val="28685E"/>
                 </a:solidFill>
+                <a:latin typeface="Arial"/>
+                <a:ea typeface="Arial"/>
+                <a:cs typeface="Arial"/>
               </a:rPr>
               <a:t>BEND THE ELBOW</a:t>
             </a:r>
@@ -5739,8 +6398,8 @@
         </p:nvSpPr>
         <p:spPr>
           <a:xfrm xmlns:a="http://schemas.openxmlformats.org/drawingml/2006/main">
-            <a:off x="6572250" y="2619375"/>
-            <a:ext cx="4953000" cy="428625"/>
+            <a:off x="6572250" y="2257425"/>
+            <a:ext cx="5010150" cy="533400"/>
           </a:xfrm>
           <a:prstGeom xmlns:a="http://schemas.openxmlformats.org/drawingml/2006/main" prst="rect">
             <a:avLst/>
@@ -5752,21 +6411,30 @@
           </a:ln>
         </p:spPr>
         <p:txBody>
-          <a:bodyPr xmlns:a="http://schemas.openxmlformats.org/drawingml/2006/main" lIns="0" tIns="0" rIns="0" bIns="0" anchor="ctr"/>
+          <a:bodyPr xmlns:a="http://schemas.openxmlformats.org/drawingml/2006/main" wrap="square" lIns="0" tIns="0" rIns="0" bIns="0" anchor="ctr">
+            <a:noAutofit/>
+          </a:bodyPr>
           <a:lstStyle xmlns:a="http://schemas.openxmlformats.org/drawingml/2006/main"/>
           <a:p xmlns:a="http://schemas.openxmlformats.org/drawingml/2006/main">
             <a:pPr>
-              <a:defRPr sz="2025" b="1">
+              <a:buNone/>
+              <a:defRPr sz="2100" b="1">
                 <a:solidFill>
                   <a:srgbClr val="A65D25"/>
                 </a:solidFill>
+                <a:latin typeface="Arial"/>
+                <a:ea typeface="Arial"/>
+                <a:cs typeface="Arial"/>
               </a:defRPr>
             </a:pPr>
             <a:r>
-              <a:rPr sz="2025" b="1">
+              <a:rPr sz="2100" b="1">
                 <a:solidFill>
                   <a:srgbClr val="A65D25"/>
                 </a:solidFill>
+                <a:latin typeface="Arial"/>
+                <a:ea typeface="Arial"/>
+                <a:cs typeface="Arial"/>
               </a:rPr>
               <a:t>ACTIVELY STRAIGHTEN</a:t>
             </a:r>
@@ -5789,8 +6457,8 @@
         </p:nvSpPr>
         <p:spPr>
           <a:xfrm xmlns:a="http://schemas.openxmlformats.org/drawingml/2006/main">
-            <a:off x="609600" y="3333750"/>
-            <a:ext cx="4953000" cy="2524125"/>
+            <a:off x="609600" y="3238500"/>
+            <a:ext cx="5143500" cy="2286000"/>
           </a:xfrm>
           <a:prstGeom xmlns:a="http://schemas.openxmlformats.org/drawingml/2006/main" prst="rect">
             <a:avLst/>
@@ -5802,14 +6470,20 @@
           </a:ln>
         </p:spPr>
         <p:txBody>
-          <a:bodyPr xmlns:a="http://schemas.openxmlformats.org/drawingml/2006/main" lIns="0" tIns="0" rIns="0" bIns="0" anchor="ctr"/>
+          <a:bodyPr xmlns:a="http://schemas.openxmlformats.org/drawingml/2006/main" wrap="square" lIns="0" tIns="0" rIns="0" bIns="0" anchor="ctr">
+            <a:noAutofit/>
+          </a:bodyPr>
           <a:lstStyle xmlns:a="http://schemas.openxmlformats.org/drawingml/2006/main"/>
           <a:p xmlns:a="http://schemas.openxmlformats.org/drawingml/2006/main">
             <a:pPr>
+              <a:buNone/>
               <a:defRPr sz="2400" b="0">
                 <a:solidFill>
                   <a:srgbClr val="152B3A"/>
                 </a:solidFill>
+                <a:latin typeface="Arial"/>
+                <a:ea typeface="Arial"/>
+                <a:cs typeface="Arial"/>
               </a:defRPr>
             </a:pPr>
             <a:r>
@@ -5817,16 +6491,23 @@
                 <a:solidFill>
                   <a:srgbClr val="152B3A"/>
                 </a:solidFill>
+                <a:latin typeface="Arial"/>
+                <a:ea typeface="Arial"/>
+                <a:cs typeface="Arial"/>
               </a:rPr>
               <a:t>Biceps contracts.</a:t>
             </a:r>
           </a:p>
           <a:p xmlns:a="http://schemas.openxmlformats.org/drawingml/2006/main">
             <a:pPr>
+              <a:buNone/>
               <a:defRPr sz="2400" b="0">
                 <a:solidFill>
                   <a:srgbClr val="152B3A"/>
                 </a:solidFill>
+                <a:latin typeface="Arial"/>
+                <a:ea typeface="Arial"/>
+                <a:cs typeface="Arial"/>
               </a:defRPr>
             </a:pPr>
             <a:r>
@@ -5834,6 +6515,9 @@
                 <a:solidFill>
                   <a:srgbClr val="152B3A"/>
                 </a:solidFill>
+                <a:latin typeface="Arial"/>
+                <a:ea typeface="Arial"/>
+                <a:cs typeface="Arial"/>
               </a:rPr>
               <a:t>Triceps relaxes.</a:t>
             </a:r>
@@ -5856,8 +6540,8 @@
         </p:nvSpPr>
         <p:spPr>
           <a:xfrm xmlns:a="http://schemas.openxmlformats.org/drawingml/2006/main">
-            <a:off x="6572250" y="3333750"/>
-            <a:ext cx="4857750" cy="2524125"/>
+            <a:off x="6572250" y="3238500"/>
+            <a:ext cx="5010150" cy="2286000"/>
           </a:xfrm>
           <a:prstGeom xmlns:a="http://schemas.openxmlformats.org/drawingml/2006/main" prst="rect">
             <a:avLst/>
@@ -5869,14 +6553,20 @@
           </a:ln>
         </p:spPr>
         <p:txBody>
-          <a:bodyPr xmlns:a="http://schemas.openxmlformats.org/drawingml/2006/main" lIns="0" tIns="0" rIns="0" bIns="0" anchor="ctr"/>
+          <a:bodyPr xmlns:a="http://schemas.openxmlformats.org/drawingml/2006/main" wrap="square" lIns="0" tIns="0" rIns="0" bIns="0" anchor="ctr">
+            <a:noAutofit/>
+          </a:bodyPr>
           <a:lstStyle xmlns:a="http://schemas.openxmlformats.org/drawingml/2006/main"/>
           <a:p xmlns:a="http://schemas.openxmlformats.org/drawingml/2006/main">
             <a:pPr>
+              <a:buNone/>
               <a:defRPr sz="2400" b="0">
                 <a:solidFill>
                   <a:srgbClr val="152B3A"/>
                 </a:solidFill>
+                <a:latin typeface="Arial"/>
+                <a:ea typeface="Arial"/>
+                <a:cs typeface="Arial"/>
               </a:defRPr>
             </a:pPr>
             <a:r>
@@ -5884,16 +6574,23 @@
                 <a:solidFill>
                   <a:srgbClr val="152B3A"/>
                 </a:solidFill>
+                <a:latin typeface="Arial"/>
+                <a:ea typeface="Arial"/>
+                <a:cs typeface="Arial"/>
               </a:rPr>
               <a:t>Triceps contracts.</a:t>
             </a:r>
           </a:p>
           <a:p xmlns:a="http://schemas.openxmlformats.org/drawingml/2006/main">
             <a:pPr>
+              <a:buNone/>
               <a:defRPr sz="2400" b="0">
                 <a:solidFill>
                   <a:srgbClr val="152B3A"/>
                 </a:solidFill>
+                <a:latin typeface="Arial"/>
+                <a:ea typeface="Arial"/>
+                <a:cs typeface="Arial"/>
               </a:defRPr>
             </a:pPr>
             <a:r>
@@ -5901,11 +6598,76 @@
                 <a:solidFill>
                   <a:srgbClr val="152B3A"/>
                 </a:solidFill>
+                <a:latin typeface="Arial"/>
+                <a:ea typeface="Arial"/>
+                <a:cs typeface="Arial"/>
               </a:rPr>
               <a:t>Biceps relaxes.</a:t>
             </a:r>
           </a:p>
         </p:txBody>
+      </p:sp>
+      <p:sp>
+        <p:nvSpPr>
+          <p:cNvPr id="14" name="">
+            <a:extLst xmlns:a="http://schemas.openxmlformats.org/drawingml/2006/main">
+              <a:ext uri="{FF2B5EF4-FFF2-40B4-BE49-F238E27FC236}">
+                <a16:creationId xmlns:a16="http://schemas.microsoft.com/office/drawing/2014/main" id="{84F8278E-5F42-45C9-ADF8-CD25C083A290}"/>
+              </a:ext>
+            </a:extLst>
+          </p:cNvPr>
+          <p:cNvSpPr>
+            <a:spLocks xmlns:a="http://schemas.openxmlformats.org/drawingml/2006/main" noGrp="1"/>
+          </p:cNvSpPr>
+          <p:nvPr/>
+        </p:nvSpPr>
+        <p:spPr>
+          <a:xfrm xmlns:a="http://schemas.openxmlformats.org/drawingml/2006/main">
+            <a:off x="609600" y="2886075"/>
+            <a:ext cx="5048250" cy="0"/>
+          </a:xfrm>
+          <a:prstGeom xmlns:a="http://schemas.openxmlformats.org/drawingml/2006/main" prst="line">
+            <a:avLst/>
+          </a:prstGeom>
+          <a:noFill xmlns:a="http://schemas.openxmlformats.org/drawingml/2006/main"/>
+          <a:ln xmlns:a="http://schemas.openxmlformats.org/drawingml/2006/main" w="28575">
+            <a:solidFill>
+              <a:srgbClr val="DCE7DD"/>
+            </a:solidFill>
+            <a:prstDash val="solid"/>
+          </a:ln>
+        </p:spPr>
+      </p:sp>
+      <p:sp>
+        <p:nvSpPr>
+          <p:cNvPr id="15" name="">
+            <a:extLst xmlns:a="http://schemas.openxmlformats.org/drawingml/2006/main">
+              <a:ext uri="{FF2B5EF4-FFF2-40B4-BE49-F238E27FC236}">
+                <a16:creationId xmlns:a16="http://schemas.microsoft.com/office/drawing/2014/main" id="{13183F15-5F98-4543-AAF2-7F831BB02687}"/>
+              </a:ext>
+            </a:extLst>
+          </p:cNvPr>
+          <p:cNvSpPr>
+            <a:spLocks xmlns:a="http://schemas.openxmlformats.org/drawingml/2006/main" noGrp="1"/>
+          </p:cNvSpPr>
+          <p:nvPr/>
+        </p:nvSpPr>
+        <p:spPr>
+          <a:xfrm xmlns:a="http://schemas.openxmlformats.org/drawingml/2006/main">
+            <a:off x="6572250" y="2886075"/>
+            <a:ext cx="5010150" cy="0"/>
+          </a:xfrm>
+          <a:prstGeom xmlns:a="http://schemas.openxmlformats.org/drawingml/2006/main" prst="line">
+            <a:avLst/>
+          </a:prstGeom>
+          <a:noFill xmlns:a="http://schemas.openxmlformats.org/drawingml/2006/main"/>
+          <a:ln xmlns:a="http://schemas.openxmlformats.org/drawingml/2006/main" w="28575">
+            <a:solidFill>
+              <a:srgbClr val="DCE7DD"/>
+            </a:solidFill>
+            <a:prstDash val="solid"/>
+          </a:ln>
+        </p:spPr>
       </p:sp>
     </p:spTree>
     <p:extLst>
@@ -5923,7 +6685,7 @@
     <p:bg>
       <p:bgPr>
         <a:solidFill xmlns:a="http://schemas.openxmlformats.org/drawingml/2006/main">
-          <a:srgbClr val="F5F1E8"/>
+          <a:srgbClr val="FBF9F3"/>
         </a:solidFill>
       </p:bgPr>
     </p:bg>
@@ -5952,8 +6714,8 @@
         </p:nvSpPr>
         <p:spPr>
           <a:xfrm xmlns:a="http://schemas.openxmlformats.org/drawingml/2006/main">
-            <a:off x="609600" y="552450"/>
-            <a:ext cx="781050" cy="57150"/>
+            <a:off x="609600" y="742950"/>
+            <a:ext cx="9906000" cy="38100"/>
           </a:xfrm>
           <a:prstGeom xmlns:a="http://schemas.openxmlformats.org/drawingml/2006/main" prst="rect">
             <a:avLst/>
@@ -5983,8 +6745,8 @@
         </p:nvSpPr>
         <p:spPr>
           <a:xfrm xmlns:a="http://schemas.openxmlformats.org/drawingml/2006/main">
-            <a:off x="609600" y="762000"/>
-            <a:ext cx="9334500" cy="285750"/>
+            <a:off x="609600" y="342900"/>
+            <a:ext cx="9334500" cy="266700"/>
           </a:xfrm>
           <a:prstGeom xmlns:a="http://schemas.openxmlformats.org/drawingml/2006/main" prst="rect">
             <a:avLst/>
@@ -5996,21 +6758,30 @@
           </a:ln>
         </p:spPr>
         <p:txBody>
-          <a:bodyPr xmlns:a="http://schemas.openxmlformats.org/drawingml/2006/main" lIns="0" tIns="0" rIns="0" bIns="0" anchor="ctr"/>
+          <a:bodyPr xmlns:a="http://schemas.openxmlformats.org/drawingml/2006/main" wrap="square" lIns="0" tIns="0" rIns="0" bIns="0" anchor="ctr">
+            <a:noAutofit/>
+          </a:bodyPr>
           <a:lstStyle xmlns:a="http://schemas.openxmlformats.org/drawingml/2006/main"/>
           <a:p xmlns:a="http://schemas.openxmlformats.org/drawingml/2006/main">
             <a:pPr>
-              <a:defRPr sz="1500" b="1">
+              <a:buNone/>
+              <a:defRPr sz="1425" b="1">
                 <a:solidFill>
                   <a:srgbClr val="28685E"/>
                 </a:solidFill>
+                <a:latin typeface="Arial"/>
+                <a:ea typeface="Arial"/>
+                <a:cs typeface="Arial"/>
               </a:defRPr>
             </a:pPr>
             <a:r>
-              <a:rPr sz="1500" b="1">
+              <a:rPr sz="1425" b="1">
                 <a:solidFill>
                   <a:srgbClr val="28685E"/>
                 </a:solidFill>
+                <a:latin typeface="Arial"/>
+                <a:ea typeface="Arial"/>
+                <a:cs typeface="Arial"/>
               </a:rPr>
               <a:t>MADE BY MATT  /  BUILD SCIENCE</a:t>
             </a:r>
@@ -6019,14 +6790,14 @@
       </p:sp>
       <p:pic>
         <p:nvPicPr>
-          <p:cNvPr id="13" name=""/>
+          <p:cNvPr id="15" name=""/>
           <p:cNvPicPr>
             <a:picLocks xmlns:a="http://schemas.openxmlformats.org/drawingml/2006/main" noChangeAspect="1"/>
           </p:cNvPicPr>
           <p:nvPr/>
         </p:nvPicPr>
         <p:blipFill>
-          <a:blip xmlns:r="http://schemas.openxmlformats.org/officeDocument/2006/relationships" xmlns:a="http://schemas.openxmlformats.org/drawingml/2006/main" r:embed="R07ed704e46544c3c"/>
+          <a:blip xmlns:r="http://schemas.openxmlformats.org/officeDocument/2006/relationships" xmlns:a="http://schemas.openxmlformats.org/drawingml/2006/main" r:embed="R7667f2beeba84e0b"/>
           <a:stretch xmlns:a="http://schemas.openxmlformats.org/drawingml/2006/main"/>
         </p:blipFill>
         <p:spPr>
@@ -6055,8 +6826,8 @@
         </p:nvSpPr>
         <p:spPr>
           <a:xfrm xmlns:a="http://schemas.openxmlformats.org/drawingml/2006/main">
-            <a:off x="609600" y="1352550"/>
-            <a:ext cx="10972800" cy="952500"/>
+            <a:off x="609600" y="1047750"/>
+            <a:ext cx="10972800" cy="895350"/>
           </a:xfrm>
           <a:prstGeom xmlns:a="http://schemas.openxmlformats.org/drawingml/2006/main" prst="rect">
             <a:avLst/>
@@ -6068,21 +6839,30 @@
           </a:ln>
         </p:spPr>
         <p:txBody>
-          <a:bodyPr xmlns:a="http://schemas.openxmlformats.org/drawingml/2006/main" lIns="0" tIns="0" rIns="0" bIns="0" anchor="ctr"/>
+          <a:bodyPr xmlns:a="http://schemas.openxmlformats.org/drawingml/2006/main" wrap="square" lIns="0" tIns="0" rIns="0" bIns="0" anchor="ctr">
+            <a:noAutofit/>
+          </a:bodyPr>
           <a:lstStyle xmlns:a="http://schemas.openxmlformats.org/drawingml/2006/main"/>
           <a:p xmlns:a="http://schemas.openxmlformats.org/drawingml/2006/main">
             <a:pPr>
-              <a:defRPr sz="3750" b="1">
+              <a:buNone/>
+              <a:defRPr sz="3600" b="1">
                 <a:solidFill>
                   <a:srgbClr val="152B3A"/>
                 </a:solidFill>
+                <a:latin typeface="Arial"/>
+                <a:ea typeface="Arial"/>
+                <a:cs typeface="Arial"/>
               </a:defRPr>
             </a:pPr>
             <a:r>
-              <a:rPr sz="3750" b="1">
+              <a:rPr sz="3600" b="1">
                 <a:solidFill>
                   <a:srgbClr val="152B3A"/>
                 </a:solidFill>
+                <a:latin typeface="Arial"/>
+                <a:ea typeface="Arial"/>
+                <a:cs typeface="Arial"/>
               </a:rPr>
               <a:t>Choose the pulling muscle</a:t>
             </a:r>
@@ -6149,21 +6929,30 @@
           </a:ln>
         </p:spPr>
         <p:txBody>
-          <a:bodyPr xmlns:a="http://schemas.openxmlformats.org/drawingml/2006/main" lIns="0" tIns="0" rIns="0" bIns="0" anchor="ctr"/>
+          <a:bodyPr xmlns:a="http://schemas.openxmlformats.org/drawingml/2006/main" wrap="square" lIns="0" tIns="0" rIns="0" bIns="0" anchor="ctr">
+            <a:noAutofit/>
+          </a:bodyPr>
           <a:lstStyle xmlns:a="http://schemas.openxmlformats.org/drawingml/2006/main"/>
           <a:p xmlns:a="http://schemas.openxmlformats.org/drawingml/2006/main">
             <a:pPr>
-              <a:defRPr sz="1275" b="0">
+              <a:buNone/>
+              <a:defRPr sz="1200" b="0">
                 <a:solidFill>
                   <a:srgbClr val="50616B"/>
                 </a:solidFill>
+                <a:latin typeface="Arial"/>
+                <a:ea typeface="Arial"/>
+                <a:cs typeface="Arial"/>
               </a:defRPr>
             </a:pPr>
             <a:r>
-              <a:rPr sz="1275" b="0">
+              <a:rPr sz="1200" b="0">
                 <a:solidFill>
                   <a:srgbClr val="50616B"/>
                 </a:solidFill>
+                <a:latin typeface="Arial"/>
+                <a:ea typeface="Arial"/>
+                <a:cs typeface="Arial"/>
               </a:rPr>
               <a:t>AUTUMN 1  ·  WEEK 4  ·  LESSON A</a:t>
             </a:r>
@@ -6199,14 +6988,20 @@
           </a:ln>
         </p:spPr>
         <p:txBody>
-          <a:bodyPr xmlns:a="http://schemas.openxmlformats.org/drawingml/2006/main" lIns="0" tIns="0" rIns="0" bIns="0" anchor="ctr"/>
+          <a:bodyPr xmlns:a="http://schemas.openxmlformats.org/drawingml/2006/main" wrap="square" lIns="0" tIns="0" rIns="0" bIns="0" anchor="ctr">
+            <a:noAutofit/>
+          </a:bodyPr>
           <a:lstStyle xmlns:a="http://schemas.openxmlformats.org/drawingml/2006/main"/>
           <a:p xmlns:a="http://schemas.openxmlformats.org/drawingml/2006/main">
             <a:pPr>
+              <a:buNone/>
               <a:defRPr sz="1350" b="1">
                 <a:solidFill>
                   <a:srgbClr val="28685E"/>
                 </a:solidFill>
+                <a:latin typeface="Arial"/>
+                <a:ea typeface="Arial"/>
+                <a:cs typeface="Arial"/>
               </a:defRPr>
             </a:pPr>
             <a:r>
@@ -6214,6 +7009,9 @@
                 <a:solidFill>
                   <a:srgbClr val="28685E"/>
                 </a:solidFill>
+                <a:latin typeface="Arial"/>
+                <a:ea typeface="Arial"/>
+                <a:cs typeface="Arial"/>
               </a:rPr>
               <a:t>06</a:t>
             </a:r>
@@ -6236,8 +7034,8 @@
         </p:nvSpPr>
         <p:spPr>
           <a:xfrm xmlns:a="http://schemas.openxmlformats.org/drawingml/2006/main">
-            <a:off x="609600" y="2619375"/>
-            <a:ext cx="10972800" cy="781050"/>
+            <a:off x="609600" y="2305050"/>
+            <a:ext cx="10972800" cy="914400"/>
           </a:xfrm>
           <a:prstGeom xmlns:a="http://schemas.openxmlformats.org/drawingml/2006/main" prst="rect">
             <a:avLst/>
@@ -6249,14 +7047,20 @@
           </a:ln>
         </p:spPr>
         <p:txBody>
-          <a:bodyPr xmlns:a="http://schemas.openxmlformats.org/drawingml/2006/main" lIns="0" tIns="0" rIns="0" bIns="0" anchor="ctr"/>
+          <a:bodyPr xmlns:a="http://schemas.openxmlformats.org/drawingml/2006/main" wrap="square" lIns="0" tIns="0" rIns="0" bIns="0" anchor="ctr">
+            <a:noAutofit/>
+          </a:bodyPr>
           <a:lstStyle xmlns:a="http://schemas.openxmlformats.org/drawingml/2006/main"/>
           <a:p xmlns:a="http://schemas.openxmlformats.org/drawingml/2006/main">
             <a:pPr>
+              <a:buNone/>
               <a:defRPr sz="2550" b="0">
                 <a:solidFill>
                   <a:srgbClr val="152B3A"/>
                 </a:solidFill>
+                <a:latin typeface="Arial"/>
+                <a:ea typeface="Arial"/>
+                <a:cs typeface="Arial"/>
               </a:defRPr>
             </a:pPr>
             <a:r>
@@ -6264,6 +7068,9 @@
                 <a:solidFill>
                   <a:srgbClr val="152B3A"/>
                 </a:solidFill>
+                <a:latin typeface="Arial"/>
+                <a:ea typeface="Arial"/>
+                <a:cs typeface="Arial"/>
               </a:rPr>
               <a:t>The card arm bends.</a:t>
             </a:r>
@@ -6286,8 +7093,8 @@
         </p:nvSpPr>
         <p:spPr>
           <a:xfrm xmlns:a="http://schemas.openxmlformats.org/drawingml/2006/main">
-            <a:off x="609600" y="3476625"/>
-            <a:ext cx="10972800" cy="781050"/>
+            <a:off x="609600" y="3352800"/>
+            <a:ext cx="10972800" cy="914400"/>
           </a:xfrm>
           <a:prstGeom xmlns:a="http://schemas.openxmlformats.org/drawingml/2006/main" prst="rect">
             <a:avLst/>
@@ -6299,14 +7106,20 @@
           </a:ln>
         </p:spPr>
         <p:txBody>
-          <a:bodyPr xmlns:a="http://schemas.openxmlformats.org/drawingml/2006/main" lIns="0" tIns="0" rIns="0" bIns="0" anchor="ctr"/>
+          <a:bodyPr xmlns:a="http://schemas.openxmlformats.org/drawingml/2006/main" wrap="square" lIns="0" tIns="0" rIns="0" bIns="0" anchor="ctr">
+            <a:noAutofit/>
+          </a:bodyPr>
           <a:lstStyle xmlns:a="http://schemas.openxmlformats.org/drawingml/2006/main"/>
           <a:p xmlns:a="http://schemas.openxmlformats.org/drawingml/2006/main">
             <a:pPr>
+              <a:buNone/>
               <a:defRPr sz="2550" b="0">
                 <a:solidFill>
                   <a:srgbClr val="152B3A"/>
                 </a:solidFill>
+                <a:latin typeface="Arial"/>
+                <a:ea typeface="Arial"/>
+                <a:cs typeface="Arial"/>
               </a:defRPr>
             </a:pPr>
             <a:r>
@@ -6314,6 +7127,9 @@
                 <a:solidFill>
                   <a:srgbClr val="152B3A"/>
                 </a:solidFill>
+                <a:latin typeface="Arial"/>
+                <a:ea typeface="Arial"/>
+                <a:cs typeface="Arial"/>
               </a:rPr>
               <a:t>Choose: biceps or triceps contracts?</a:t>
             </a:r>
@@ -6336,8 +7152,8 @@
         </p:nvSpPr>
         <p:spPr>
           <a:xfrm xmlns:a="http://schemas.openxmlformats.org/drawingml/2006/main">
-            <a:off x="609600" y="4333875"/>
-            <a:ext cx="10972800" cy="781050"/>
+            <a:off x="609600" y="4400550"/>
+            <a:ext cx="10972800" cy="914400"/>
           </a:xfrm>
           <a:prstGeom xmlns:a="http://schemas.openxmlformats.org/drawingml/2006/main" prst="rect">
             <a:avLst/>
@@ -6349,21 +7165,30 @@
           </a:ln>
         </p:spPr>
         <p:txBody>
-          <a:bodyPr xmlns:a="http://schemas.openxmlformats.org/drawingml/2006/main" lIns="0" tIns="0" rIns="0" bIns="0" anchor="ctr"/>
+          <a:bodyPr xmlns:a="http://schemas.openxmlformats.org/drawingml/2006/main" wrap="square" lIns="0" tIns="0" rIns="0" bIns="0" anchor="ctr">
+            <a:noAutofit/>
+          </a:bodyPr>
           <a:lstStyle xmlns:a="http://schemas.openxmlformats.org/drawingml/2006/main"/>
           <a:p xmlns:a="http://schemas.openxmlformats.org/drawingml/2006/main">
             <a:pPr>
-              <a:defRPr sz="2550" b="0">
-                <a:solidFill>
-                  <a:srgbClr val="152B3A"/>
-                </a:solidFill>
+              <a:buNone/>
+              <a:defRPr sz="2550" b="1">
+                <a:solidFill>
+                  <a:srgbClr val="28685E"/>
+                </a:solidFill>
+                <a:latin typeface="Arial"/>
+                <a:ea typeface="Arial"/>
+                <a:cs typeface="Arial"/>
               </a:defRPr>
             </a:pPr>
             <a:r>
-              <a:rPr sz="2550" b="0">
-                <a:solidFill>
-                  <a:srgbClr val="152B3A"/>
-                </a:solidFill>
+              <a:rPr sz="2550" b="1">
+                <a:solidFill>
+                  <a:srgbClr val="28685E"/>
+                </a:solidFill>
+                <a:latin typeface="Arial"/>
+                <a:ea typeface="Arial"/>
+                <a:cs typeface="Arial"/>
               </a:rPr>
               <a:t>Say, sign or point before the explanation.</a:t>
             </a:r>
@@ -6386,7 +7211,7 @@
     <p:bg>
       <p:bgPr>
         <a:solidFill xmlns:a="http://schemas.openxmlformats.org/drawingml/2006/main">
-          <a:srgbClr val="F5F1E8"/>
+          <a:srgbClr val="FBF9F3"/>
         </a:solidFill>
       </p:bgPr>
     </p:bg>
@@ -6415,8 +7240,8 @@
         </p:nvSpPr>
         <p:spPr>
           <a:xfrm xmlns:a="http://schemas.openxmlformats.org/drawingml/2006/main">
-            <a:off x="609600" y="552450"/>
-            <a:ext cx="781050" cy="57150"/>
+            <a:off x="609600" y="742950"/>
+            <a:ext cx="9906000" cy="38100"/>
           </a:xfrm>
           <a:prstGeom xmlns:a="http://schemas.openxmlformats.org/drawingml/2006/main" prst="rect">
             <a:avLst/>
@@ -6446,8 +7271,8 @@
         </p:nvSpPr>
         <p:spPr>
           <a:xfrm xmlns:a="http://schemas.openxmlformats.org/drawingml/2006/main">
-            <a:off x="609600" y="762000"/>
-            <a:ext cx="9334500" cy="285750"/>
+            <a:off x="609600" y="342900"/>
+            <a:ext cx="9334500" cy="266700"/>
           </a:xfrm>
           <a:prstGeom xmlns:a="http://schemas.openxmlformats.org/drawingml/2006/main" prst="rect">
             <a:avLst/>
@@ -6459,21 +7284,30 @@
           </a:ln>
         </p:spPr>
         <p:txBody>
-          <a:bodyPr xmlns:a="http://schemas.openxmlformats.org/drawingml/2006/main" lIns="0" tIns="0" rIns="0" bIns="0" anchor="ctr"/>
+          <a:bodyPr xmlns:a="http://schemas.openxmlformats.org/drawingml/2006/main" wrap="square" lIns="0" tIns="0" rIns="0" bIns="0" anchor="ctr">
+            <a:noAutofit/>
+          </a:bodyPr>
           <a:lstStyle xmlns:a="http://schemas.openxmlformats.org/drawingml/2006/main"/>
           <a:p xmlns:a="http://schemas.openxmlformats.org/drawingml/2006/main">
             <a:pPr>
-              <a:defRPr sz="1500" b="1">
+              <a:buNone/>
+              <a:defRPr sz="1425" b="1">
                 <a:solidFill>
                   <a:srgbClr val="28685E"/>
                 </a:solidFill>
+                <a:latin typeface="Arial"/>
+                <a:ea typeface="Arial"/>
+                <a:cs typeface="Arial"/>
               </a:defRPr>
             </a:pPr>
             <a:r>
-              <a:rPr sz="1500" b="1">
+              <a:rPr sz="1425" b="1">
                 <a:solidFill>
                   <a:srgbClr val="28685E"/>
                 </a:solidFill>
+                <a:latin typeface="Arial"/>
+                <a:ea typeface="Arial"/>
+                <a:cs typeface="Arial"/>
               </a:rPr>
               <a:t>MADE BY MATT  /  BUILD SCIENCE</a:t>
             </a:r>
@@ -6482,14 +7316,14 @@
       </p:sp>
       <p:pic>
         <p:nvPicPr>
-          <p:cNvPr id="13" name=""/>
+          <p:cNvPr id="15" name=""/>
           <p:cNvPicPr>
             <a:picLocks xmlns:a="http://schemas.openxmlformats.org/drawingml/2006/main" noChangeAspect="1"/>
           </p:cNvPicPr>
           <p:nvPr/>
         </p:nvPicPr>
         <p:blipFill>
-          <a:blip xmlns:r="http://schemas.openxmlformats.org/officeDocument/2006/relationships" xmlns:a="http://schemas.openxmlformats.org/drawingml/2006/main" r:embed="R6275e60e82424e95"/>
+          <a:blip xmlns:r="http://schemas.openxmlformats.org/officeDocument/2006/relationships" xmlns:a="http://schemas.openxmlformats.org/drawingml/2006/main" r:embed="R5040910330a0481b"/>
           <a:stretch xmlns:a="http://schemas.openxmlformats.org/drawingml/2006/main"/>
         </p:blipFill>
         <p:spPr>
@@ -6518,8 +7352,8 @@
         </p:nvSpPr>
         <p:spPr>
           <a:xfrm xmlns:a="http://schemas.openxmlformats.org/drawingml/2006/main">
-            <a:off x="609600" y="1352550"/>
-            <a:ext cx="10972800" cy="952500"/>
+            <a:off x="609600" y="1047750"/>
+            <a:ext cx="10972800" cy="895350"/>
           </a:xfrm>
           <a:prstGeom xmlns:a="http://schemas.openxmlformats.org/drawingml/2006/main" prst="rect">
             <a:avLst/>
@@ -6531,21 +7365,30 @@
           </a:ln>
         </p:spPr>
         <p:txBody>
-          <a:bodyPr xmlns:a="http://schemas.openxmlformats.org/drawingml/2006/main" lIns="0" tIns="0" rIns="0" bIns="0" anchor="ctr"/>
+          <a:bodyPr xmlns:a="http://schemas.openxmlformats.org/drawingml/2006/main" wrap="square" lIns="0" tIns="0" rIns="0" bIns="0" anchor="ctr">
+            <a:noAutofit/>
+          </a:bodyPr>
           <a:lstStyle xmlns:a="http://schemas.openxmlformats.org/drawingml/2006/main"/>
           <a:p xmlns:a="http://schemas.openxmlformats.org/drawingml/2006/main">
             <a:pPr>
-              <a:defRPr sz="3750" b="1">
+              <a:buNone/>
+              <a:defRPr sz="3600" b="1">
                 <a:solidFill>
                   <a:srgbClr val="152B3A"/>
                 </a:solidFill>
+                <a:latin typeface="Arial"/>
+                <a:ea typeface="Arial"/>
+                <a:cs typeface="Arial"/>
               </a:defRPr>
             </a:pPr>
             <a:r>
-              <a:rPr sz="3750" b="1">
+              <a:rPr sz="3600" b="1">
                 <a:solidFill>
                   <a:srgbClr val="152B3A"/>
                 </a:solidFill>
+                <a:latin typeface="Arial"/>
+                <a:ea typeface="Arial"/>
+                <a:cs typeface="Arial"/>
               </a:rPr>
               <a:t>Now swap the action</a:t>
             </a:r>
@@ -6612,21 +7455,30 @@
           </a:ln>
         </p:spPr>
         <p:txBody>
-          <a:bodyPr xmlns:a="http://schemas.openxmlformats.org/drawingml/2006/main" lIns="0" tIns="0" rIns="0" bIns="0" anchor="ctr"/>
+          <a:bodyPr xmlns:a="http://schemas.openxmlformats.org/drawingml/2006/main" wrap="square" lIns="0" tIns="0" rIns="0" bIns="0" anchor="ctr">
+            <a:noAutofit/>
+          </a:bodyPr>
           <a:lstStyle xmlns:a="http://schemas.openxmlformats.org/drawingml/2006/main"/>
           <a:p xmlns:a="http://schemas.openxmlformats.org/drawingml/2006/main">
             <a:pPr>
-              <a:defRPr sz="1275" b="0">
+              <a:buNone/>
+              <a:defRPr sz="1200" b="0">
                 <a:solidFill>
                   <a:srgbClr val="50616B"/>
                 </a:solidFill>
+                <a:latin typeface="Arial"/>
+                <a:ea typeface="Arial"/>
+                <a:cs typeface="Arial"/>
               </a:defRPr>
             </a:pPr>
             <a:r>
-              <a:rPr sz="1275" b="0">
+              <a:rPr sz="1200" b="0">
                 <a:solidFill>
                   <a:srgbClr val="50616B"/>
                 </a:solidFill>
+                <a:latin typeface="Arial"/>
+                <a:ea typeface="Arial"/>
+                <a:cs typeface="Arial"/>
               </a:rPr>
               <a:t>AUTUMN 1  ·  WEEK 4  ·  LESSON A</a:t>
             </a:r>
@@ -6662,14 +7514,20 @@
           </a:ln>
         </p:spPr>
         <p:txBody>
-          <a:bodyPr xmlns:a="http://schemas.openxmlformats.org/drawingml/2006/main" lIns="0" tIns="0" rIns="0" bIns="0" anchor="ctr"/>
+          <a:bodyPr xmlns:a="http://schemas.openxmlformats.org/drawingml/2006/main" wrap="square" lIns="0" tIns="0" rIns="0" bIns="0" anchor="ctr">
+            <a:noAutofit/>
+          </a:bodyPr>
           <a:lstStyle xmlns:a="http://schemas.openxmlformats.org/drawingml/2006/main"/>
           <a:p xmlns:a="http://schemas.openxmlformats.org/drawingml/2006/main">
             <a:pPr>
+              <a:buNone/>
               <a:defRPr sz="1350" b="1">
                 <a:solidFill>
                   <a:srgbClr val="28685E"/>
                 </a:solidFill>
+                <a:latin typeface="Arial"/>
+                <a:ea typeface="Arial"/>
+                <a:cs typeface="Arial"/>
               </a:defRPr>
             </a:pPr>
             <a:r>
@@ -6677,6 +7535,9 @@
                 <a:solidFill>
                   <a:srgbClr val="28685E"/>
                 </a:solidFill>
+                <a:latin typeface="Arial"/>
+                <a:ea typeface="Arial"/>
+                <a:cs typeface="Arial"/>
               </a:rPr>
               <a:t>07</a:t>
             </a:r>
@@ -6699,8 +7560,8 @@
         </p:nvSpPr>
         <p:spPr>
           <a:xfrm xmlns:a="http://schemas.openxmlformats.org/drawingml/2006/main">
-            <a:off x="609600" y="2619375"/>
-            <a:ext cx="10972800" cy="781050"/>
+            <a:off x="609600" y="2305050"/>
+            <a:ext cx="10972800" cy="914400"/>
           </a:xfrm>
           <a:prstGeom xmlns:a="http://schemas.openxmlformats.org/drawingml/2006/main" prst="rect">
             <a:avLst/>
@@ -6712,14 +7573,20 @@
           </a:ln>
         </p:spPr>
         <p:txBody>
-          <a:bodyPr xmlns:a="http://schemas.openxmlformats.org/drawingml/2006/main" lIns="0" tIns="0" rIns="0" bIns="0" anchor="ctr"/>
+          <a:bodyPr xmlns:a="http://schemas.openxmlformats.org/drawingml/2006/main" wrap="square" lIns="0" tIns="0" rIns="0" bIns="0" anchor="ctr">
+            <a:noAutofit/>
+          </a:bodyPr>
           <a:lstStyle xmlns:a="http://schemas.openxmlformats.org/drawingml/2006/main"/>
           <a:p xmlns:a="http://schemas.openxmlformats.org/drawingml/2006/main">
             <a:pPr>
+              <a:buNone/>
               <a:defRPr sz="2550" b="0">
                 <a:solidFill>
                   <a:srgbClr val="152B3A"/>
                 </a:solidFill>
+                <a:latin typeface="Arial"/>
+                <a:ea typeface="Arial"/>
+                <a:cs typeface="Arial"/>
               </a:defRPr>
             </a:pPr>
             <a:r>
@@ -6727,6 +7594,9 @@
                 <a:solidFill>
                   <a:srgbClr val="152B3A"/>
                 </a:solidFill>
+                <a:latin typeface="Arial"/>
+                <a:ea typeface="Arial"/>
+                <a:cs typeface="Arial"/>
               </a:rPr>
               <a:t>The model actively straightens.</a:t>
             </a:r>
@@ -6749,8 +7619,8 @@
         </p:nvSpPr>
         <p:spPr>
           <a:xfrm xmlns:a="http://schemas.openxmlformats.org/drawingml/2006/main">
-            <a:off x="609600" y="3476625"/>
-            <a:ext cx="10972800" cy="781050"/>
+            <a:off x="609600" y="3352800"/>
+            <a:ext cx="10972800" cy="914400"/>
           </a:xfrm>
           <a:prstGeom xmlns:a="http://schemas.openxmlformats.org/drawingml/2006/main" prst="rect">
             <a:avLst/>
@@ -6762,14 +7632,20 @@
           </a:ln>
         </p:spPr>
         <p:txBody>
-          <a:bodyPr xmlns:a="http://schemas.openxmlformats.org/drawingml/2006/main" lIns="0" tIns="0" rIns="0" bIns="0" anchor="ctr"/>
+          <a:bodyPr xmlns:a="http://schemas.openxmlformats.org/drawingml/2006/main" wrap="square" lIns="0" tIns="0" rIns="0" bIns="0" anchor="ctr">
+            <a:noAutofit/>
+          </a:bodyPr>
           <a:lstStyle xmlns:a="http://schemas.openxmlformats.org/drawingml/2006/main"/>
           <a:p xmlns:a="http://schemas.openxmlformats.org/drawingml/2006/main">
             <a:pPr>
+              <a:buNone/>
               <a:defRPr sz="2550" b="0">
                 <a:solidFill>
                   <a:srgbClr val="152B3A"/>
                 </a:solidFill>
+                <a:latin typeface="Arial"/>
+                <a:ea typeface="Arial"/>
+                <a:cs typeface="Arial"/>
               </a:defRPr>
             </a:pPr>
             <a:r>
@@ -6777,6 +7653,9 @@
                 <a:solidFill>
                   <a:srgbClr val="152B3A"/>
                 </a:solidFill>
+                <a:latin typeface="Arial"/>
+                <a:ea typeface="Arial"/>
+                <a:cs typeface="Arial"/>
               </a:rPr>
               <a:t>Which muscle contracts now?</a:t>
             </a:r>
@@ -6799,8 +7678,8 @@
         </p:nvSpPr>
         <p:spPr>
           <a:xfrm xmlns:a="http://schemas.openxmlformats.org/drawingml/2006/main">
-            <a:off x="609600" y="4333875"/>
-            <a:ext cx="10972800" cy="781050"/>
+            <a:off x="609600" y="4400550"/>
+            <a:ext cx="10972800" cy="914400"/>
           </a:xfrm>
           <a:prstGeom xmlns:a="http://schemas.openxmlformats.org/drawingml/2006/main" prst="rect">
             <a:avLst/>
@@ -6812,21 +7691,30 @@
           </a:ln>
         </p:spPr>
         <p:txBody>
-          <a:bodyPr xmlns:a="http://schemas.openxmlformats.org/drawingml/2006/main" lIns="0" tIns="0" rIns="0" bIns="0" anchor="ctr"/>
+          <a:bodyPr xmlns:a="http://schemas.openxmlformats.org/drawingml/2006/main" wrap="square" lIns="0" tIns="0" rIns="0" bIns="0" anchor="ctr">
+            <a:noAutofit/>
+          </a:bodyPr>
           <a:lstStyle xmlns:a="http://schemas.openxmlformats.org/drawingml/2006/main"/>
           <a:p xmlns:a="http://schemas.openxmlformats.org/drawingml/2006/main">
             <a:pPr>
-              <a:defRPr sz="2550" b="0">
-                <a:solidFill>
-                  <a:srgbClr val="152B3A"/>
-                </a:solidFill>
+              <a:buNone/>
+              <a:defRPr sz="2550" b="1">
+                <a:solidFill>
+                  <a:srgbClr val="28685E"/>
+                </a:solidFill>
+                <a:latin typeface="Arial"/>
+                <a:ea typeface="Arial"/>
+                <a:cs typeface="Arial"/>
               </a:defRPr>
             </a:pPr>
             <a:r>
-              <a:rPr sz="2550" b="0">
-                <a:solidFill>
-                  <a:srgbClr val="152B3A"/>
-                </a:solidFill>
+              <a:rPr sz="2550" b="1">
+                <a:solidFill>
+                  <a:srgbClr val="28685E"/>
+                </a:solidFill>
+                <a:latin typeface="Arial"/>
+                <a:ea typeface="Arial"/>
+                <a:cs typeface="Arial"/>
               </a:rPr>
               <a:t>What happens to its partner?</a:t>
             </a:r>
@@ -6849,7 +7737,7 @@
     <p:bg>
       <p:bgPr>
         <a:solidFill xmlns:a="http://schemas.openxmlformats.org/drawingml/2006/main">
-          <a:srgbClr val="F5F1E8"/>
+          <a:srgbClr val="FBF9F3"/>
         </a:solidFill>
       </p:bgPr>
     </p:bg>
@@ -6878,8 +7766,8 @@
         </p:nvSpPr>
         <p:spPr>
           <a:xfrm xmlns:a="http://schemas.openxmlformats.org/drawingml/2006/main">
-            <a:off x="609600" y="552450"/>
-            <a:ext cx="781050" cy="57150"/>
+            <a:off x="609600" y="742950"/>
+            <a:ext cx="9906000" cy="38100"/>
           </a:xfrm>
           <a:prstGeom xmlns:a="http://schemas.openxmlformats.org/drawingml/2006/main" prst="rect">
             <a:avLst/>
@@ -6909,8 +7797,8 @@
         </p:nvSpPr>
         <p:spPr>
           <a:xfrm xmlns:a="http://schemas.openxmlformats.org/drawingml/2006/main">
-            <a:off x="609600" y="762000"/>
-            <a:ext cx="9334500" cy="285750"/>
+            <a:off x="609600" y="342900"/>
+            <a:ext cx="9334500" cy="266700"/>
           </a:xfrm>
           <a:prstGeom xmlns:a="http://schemas.openxmlformats.org/drawingml/2006/main" prst="rect">
             <a:avLst/>
@@ -6922,21 +7810,30 @@
           </a:ln>
         </p:spPr>
         <p:txBody>
-          <a:bodyPr xmlns:a="http://schemas.openxmlformats.org/drawingml/2006/main" lIns="0" tIns="0" rIns="0" bIns="0" anchor="ctr"/>
+          <a:bodyPr xmlns:a="http://schemas.openxmlformats.org/drawingml/2006/main" wrap="square" lIns="0" tIns="0" rIns="0" bIns="0" anchor="ctr">
+            <a:noAutofit/>
+          </a:bodyPr>
           <a:lstStyle xmlns:a="http://schemas.openxmlformats.org/drawingml/2006/main"/>
           <a:p xmlns:a="http://schemas.openxmlformats.org/drawingml/2006/main">
             <a:pPr>
-              <a:defRPr sz="1500" b="1">
+              <a:buNone/>
+              <a:defRPr sz="1425" b="1">
                 <a:solidFill>
                   <a:srgbClr val="28685E"/>
                 </a:solidFill>
+                <a:latin typeface="Arial"/>
+                <a:ea typeface="Arial"/>
+                <a:cs typeface="Arial"/>
               </a:defRPr>
             </a:pPr>
             <a:r>
-              <a:rPr sz="1500" b="1">
+              <a:rPr sz="1425" b="1">
                 <a:solidFill>
                   <a:srgbClr val="28685E"/>
                 </a:solidFill>
+                <a:latin typeface="Arial"/>
+                <a:ea typeface="Arial"/>
+                <a:cs typeface="Arial"/>
               </a:rPr>
               <a:t>MADE BY MATT  /  BUILD SCIENCE</a:t>
             </a:r>
@@ -6945,14 +7842,14 @@
       </p:sp>
       <p:pic>
         <p:nvPicPr>
-          <p:cNvPr id="14" name=""/>
+          <p:cNvPr id="20" name=""/>
           <p:cNvPicPr>
             <a:picLocks xmlns:a="http://schemas.openxmlformats.org/drawingml/2006/main" noChangeAspect="1"/>
           </p:cNvPicPr>
           <p:nvPr/>
         </p:nvPicPr>
         <p:blipFill>
-          <a:blip xmlns:r="http://schemas.openxmlformats.org/officeDocument/2006/relationships" xmlns:a="http://schemas.openxmlformats.org/drawingml/2006/main" r:embed="Rb427821752964d55"/>
+          <a:blip xmlns:r="http://schemas.openxmlformats.org/officeDocument/2006/relationships" xmlns:a="http://schemas.openxmlformats.org/drawingml/2006/main" r:embed="Re15a26e313c4434d"/>
           <a:stretch xmlns:a="http://schemas.openxmlformats.org/drawingml/2006/main"/>
         </p:blipFill>
         <p:spPr>
@@ -6981,8 +7878,8 @@
         </p:nvSpPr>
         <p:spPr>
           <a:xfrm xmlns:a="http://schemas.openxmlformats.org/drawingml/2006/main">
-            <a:off x="609600" y="1352550"/>
-            <a:ext cx="10972800" cy="952500"/>
+            <a:off x="609600" y="1047750"/>
+            <a:ext cx="10972800" cy="895350"/>
           </a:xfrm>
           <a:prstGeom xmlns:a="http://schemas.openxmlformats.org/drawingml/2006/main" prst="rect">
             <a:avLst/>
@@ -6994,21 +7891,30 @@
           </a:ln>
         </p:spPr>
         <p:txBody>
-          <a:bodyPr xmlns:a="http://schemas.openxmlformats.org/drawingml/2006/main" lIns="0" tIns="0" rIns="0" bIns="0" anchor="ctr"/>
+          <a:bodyPr xmlns:a="http://schemas.openxmlformats.org/drawingml/2006/main" wrap="square" lIns="0" tIns="0" rIns="0" bIns="0" anchor="ctr">
+            <a:noAutofit/>
+          </a:bodyPr>
           <a:lstStyle xmlns:a="http://schemas.openxmlformats.org/drawingml/2006/main"/>
           <a:p xmlns:a="http://schemas.openxmlformats.org/drawingml/2006/main">
             <a:pPr>
-              <a:defRPr sz="3750" b="1">
+              <a:buNone/>
+              <a:defRPr sz="3600" b="1">
                 <a:solidFill>
                   <a:srgbClr val="152B3A"/>
                 </a:solidFill>
+                <a:latin typeface="Arial"/>
+                <a:ea typeface="Arial"/>
+                <a:cs typeface="Arial"/>
               </a:defRPr>
             </a:pPr>
             <a:r>
-              <a:rPr sz="3750" b="1">
+              <a:rPr sz="3600" b="1">
                 <a:solidFill>
                   <a:srgbClr val="152B3A"/>
                 </a:solidFill>
+                <a:latin typeface="Arial"/>
+                <a:ea typeface="Arial"/>
+                <a:cs typeface="Arial"/>
               </a:rPr>
               <a:t>Model and muscle: compare</a:t>
             </a:r>
@@ -7075,21 +7981,30 @@
           </a:ln>
         </p:spPr>
         <p:txBody>
-          <a:bodyPr xmlns:a="http://schemas.openxmlformats.org/drawingml/2006/main" lIns="0" tIns="0" rIns="0" bIns="0" anchor="ctr"/>
+          <a:bodyPr xmlns:a="http://schemas.openxmlformats.org/drawingml/2006/main" wrap="square" lIns="0" tIns="0" rIns="0" bIns="0" anchor="ctr">
+            <a:noAutofit/>
+          </a:bodyPr>
           <a:lstStyle xmlns:a="http://schemas.openxmlformats.org/drawingml/2006/main"/>
           <a:p xmlns:a="http://schemas.openxmlformats.org/drawingml/2006/main">
             <a:pPr>
-              <a:defRPr sz="1275" b="0">
+              <a:buNone/>
+              <a:defRPr sz="1200" b="0">
                 <a:solidFill>
                   <a:srgbClr val="50616B"/>
                 </a:solidFill>
+                <a:latin typeface="Arial"/>
+                <a:ea typeface="Arial"/>
+                <a:cs typeface="Arial"/>
               </a:defRPr>
             </a:pPr>
             <a:r>
-              <a:rPr sz="1275" b="0">
+              <a:rPr sz="1200" b="0">
                 <a:solidFill>
                   <a:srgbClr val="50616B"/>
                 </a:solidFill>
+                <a:latin typeface="Arial"/>
+                <a:ea typeface="Arial"/>
+                <a:cs typeface="Arial"/>
               </a:rPr>
               <a:t>AUTUMN 1  ·  WEEK 4  ·  LESSON A</a:t>
             </a:r>
@@ -7125,14 +8040,20 @@
           </a:ln>
         </p:spPr>
         <p:txBody>
-          <a:bodyPr xmlns:a="http://schemas.openxmlformats.org/drawingml/2006/main" lIns="0" tIns="0" rIns="0" bIns="0" anchor="ctr"/>
+          <a:bodyPr xmlns:a="http://schemas.openxmlformats.org/drawingml/2006/main" wrap="square" lIns="0" tIns="0" rIns="0" bIns="0" anchor="ctr">
+            <a:noAutofit/>
+          </a:bodyPr>
           <a:lstStyle xmlns:a="http://schemas.openxmlformats.org/drawingml/2006/main"/>
           <a:p xmlns:a="http://schemas.openxmlformats.org/drawingml/2006/main">
             <a:pPr>
+              <a:buNone/>
               <a:defRPr sz="1350" b="1">
                 <a:solidFill>
                   <a:srgbClr val="28685E"/>
                 </a:solidFill>
+                <a:latin typeface="Arial"/>
+                <a:ea typeface="Arial"/>
+                <a:cs typeface="Arial"/>
               </a:defRPr>
             </a:pPr>
             <a:r>
@@ -7140,6 +8061,9 @@
                 <a:solidFill>
                   <a:srgbClr val="28685E"/>
                 </a:solidFill>
+                <a:latin typeface="Arial"/>
+                <a:ea typeface="Arial"/>
+                <a:cs typeface="Arial"/>
               </a:rPr>
               <a:t>08</a:t>
             </a:r>
@@ -7162,8 +8086,8 @@
         </p:nvSpPr>
         <p:spPr>
           <a:xfrm xmlns:a="http://schemas.openxmlformats.org/drawingml/2006/main">
-            <a:off x="609600" y="2619375"/>
-            <a:ext cx="4953000" cy="428625"/>
+            <a:off x="609600" y="2257425"/>
+            <a:ext cx="5143500" cy="533400"/>
           </a:xfrm>
           <a:prstGeom xmlns:a="http://schemas.openxmlformats.org/drawingml/2006/main" prst="rect">
             <a:avLst/>
@@ -7175,21 +8099,30 @@
           </a:ln>
         </p:spPr>
         <p:txBody>
-          <a:bodyPr xmlns:a="http://schemas.openxmlformats.org/drawingml/2006/main" lIns="0" tIns="0" rIns="0" bIns="0" anchor="ctr"/>
+          <a:bodyPr xmlns:a="http://schemas.openxmlformats.org/drawingml/2006/main" wrap="square" lIns="0" tIns="0" rIns="0" bIns="0" anchor="ctr">
+            <a:noAutofit/>
+          </a:bodyPr>
           <a:lstStyle xmlns:a="http://schemas.openxmlformats.org/drawingml/2006/main"/>
           <a:p xmlns:a="http://schemas.openxmlformats.org/drawingml/2006/main">
             <a:pPr>
-              <a:defRPr sz="2025" b="1">
+              <a:buNone/>
+              <a:defRPr sz="2100" b="1">
                 <a:solidFill>
                   <a:srgbClr val="28685E"/>
                 </a:solidFill>
+                <a:latin typeface="Arial"/>
+                <a:ea typeface="Arial"/>
+                <a:cs typeface="Arial"/>
               </a:defRPr>
             </a:pPr>
             <a:r>
-              <a:rPr sz="2025" b="1">
+              <a:rPr sz="2100" b="1">
                 <a:solidFill>
                   <a:srgbClr val="28685E"/>
                 </a:solidFill>
+                <a:latin typeface="Arial"/>
+                <a:ea typeface="Arial"/>
+                <a:cs typeface="Arial"/>
               </a:rPr>
               <a:t>WHAT THE MODEL SHOWS</a:t>
             </a:r>
@@ -7212,8 +8145,8 @@
         </p:nvSpPr>
         <p:spPr>
           <a:xfrm xmlns:a="http://schemas.openxmlformats.org/drawingml/2006/main">
-            <a:off x="6572250" y="2619375"/>
-            <a:ext cx="4953000" cy="428625"/>
+            <a:off x="6572250" y="2257425"/>
+            <a:ext cx="5010150" cy="533400"/>
           </a:xfrm>
           <a:prstGeom xmlns:a="http://schemas.openxmlformats.org/drawingml/2006/main" prst="rect">
             <a:avLst/>
@@ -7225,21 +8158,30 @@
           </a:ln>
         </p:spPr>
         <p:txBody>
-          <a:bodyPr xmlns:a="http://schemas.openxmlformats.org/drawingml/2006/main" lIns="0" tIns="0" rIns="0" bIns="0" anchor="ctr"/>
+          <a:bodyPr xmlns:a="http://schemas.openxmlformats.org/drawingml/2006/main" wrap="square" lIns="0" tIns="0" rIns="0" bIns="0" anchor="ctr">
+            <a:noAutofit/>
+          </a:bodyPr>
           <a:lstStyle xmlns:a="http://schemas.openxmlformats.org/drawingml/2006/main"/>
           <a:p xmlns:a="http://schemas.openxmlformats.org/drawingml/2006/main">
             <a:pPr>
-              <a:defRPr sz="2025" b="1">
+              <a:buNone/>
+              <a:defRPr sz="2100" b="1">
                 <a:solidFill>
                   <a:srgbClr val="A65D25"/>
                 </a:solidFill>
+                <a:latin typeface="Arial"/>
+                <a:ea typeface="Arial"/>
+                <a:cs typeface="Arial"/>
               </a:defRPr>
             </a:pPr>
             <a:r>
-              <a:rPr sz="2025" b="1">
+              <a:rPr sz="2100" b="1">
                 <a:solidFill>
                   <a:srgbClr val="A65D25"/>
                 </a:solidFill>
+                <a:latin typeface="Arial"/>
+                <a:ea typeface="Arial"/>
+                <a:cs typeface="Arial"/>
               </a:rPr>
               <a:t>WHAT IT DOES NOT SHOW</a:t>
             </a:r>
@@ -7262,8 +8204,8 @@
         </p:nvSpPr>
         <p:spPr>
           <a:xfrm xmlns:a="http://schemas.openxmlformats.org/drawingml/2006/main">
-            <a:off x="609600" y="3333750"/>
-            <a:ext cx="4953000" cy="2524125"/>
+            <a:off x="609600" y="4381500"/>
+            <a:ext cx="5143500" cy="1571625"/>
           </a:xfrm>
           <a:prstGeom xmlns:a="http://schemas.openxmlformats.org/drawingml/2006/main" prst="rect">
             <a:avLst/>
@@ -7275,14 +8217,20 @@
           </a:ln>
         </p:spPr>
         <p:txBody>
-          <a:bodyPr xmlns:a="http://schemas.openxmlformats.org/drawingml/2006/main" lIns="0" tIns="0" rIns="0" bIns="0" anchor="ctr"/>
+          <a:bodyPr xmlns:a="http://schemas.openxmlformats.org/drawingml/2006/main" wrap="square" lIns="0" tIns="0" rIns="0" bIns="0" anchor="ctr">
+            <a:noAutofit/>
+          </a:bodyPr>
           <a:lstStyle xmlns:a="http://schemas.openxmlformats.org/drawingml/2006/main"/>
           <a:p xmlns:a="http://schemas.openxmlformats.org/drawingml/2006/main">
             <a:pPr>
+              <a:buNone/>
               <a:defRPr sz="2400" b="0">
                 <a:solidFill>
                   <a:srgbClr val="152B3A"/>
                 </a:solidFill>
+                <a:latin typeface="Arial"/>
+                <a:ea typeface="Arial"/>
+                <a:cs typeface="Arial"/>
               </a:defRPr>
             </a:pPr>
             <a:r>
@@ -7290,16 +8238,23 @@
                 <a:solidFill>
                   <a:srgbClr val="152B3A"/>
                 </a:solidFill>
+                <a:latin typeface="Arial"/>
+                <a:ea typeface="Arial"/>
+                <a:cs typeface="Arial"/>
               </a:rPr>
               <a:t>A joint allows movement.</a:t>
             </a:r>
           </a:p>
           <a:p xmlns:a="http://schemas.openxmlformats.org/drawingml/2006/main">
             <a:pPr>
+              <a:buNone/>
               <a:defRPr sz="2400" b="0">
                 <a:solidFill>
                   <a:srgbClr val="152B3A"/>
                 </a:solidFill>
+                <a:latin typeface="Arial"/>
+                <a:ea typeface="Arial"/>
+                <a:cs typeface="Arial"/>
               </a:defRPr>
             </a:pPr>
             <a:r>
@@ -7307,16 +8262,23 @@
                 <a:solidFill>
                   <a:srgbClr val="152B3A"/>
                 </a:solidFill>
+                <a:latin typeface="Arial"/>
+                <a:ea typeface="Arial"/>
+                <a:cs typeface="Arial"/>
               </a:rPr>
               <a:t>A pull acts on each side.</a:t>
             </a:r>
           </a:p>
           <a:p xmlns:a="http://schemas.openxmlformats.org/drawingml/2006/main">
             <a:pPr>
+              <a:buNone/>
               <a:defRPr sz="2400" b="0">
                 <a:solidFill>
                   <a:srgbClr val="152B3A"/>
                 </a:solidFill>
+                <a:latin typeface="Arial"/>
+                <a:ea typeface="Arial"/>
+                <a:cs typeface="Arial"/>
               </a:defRPr>
             </a:pPr>
             <a:r>
@@ -7324,6 +8286,9 @@
                 <a:solidFill>
                   <a:srgbClr val="152B3A"/>
                 </a:solidFill>
+                <a:latin typeface="Arial"/>
+                <a:ea typeface="Arial"/>
+                <a:cs typeface="Arial"/>
               </a:rPr>
               <a:t>The roles can swap.</a:t>
             </a:r>
@@ -7346,8 +8311,8 @@
         </p:nvSpPr>
         <p:spPr>
           <a:xfrm xmlns:a="http://schemas.openxmlformats.org/drawingml/2006/main">
-            <a:off x="6572250" y="3333750"/>
-            <a:ext cx="4857750" cy="2524125"/>
+            <a:off x="6572250" y="4381500"/>
+            <a:ext cx="5010150" cy="1571625"/>
           </a:xfrm>
           <a:prstGeom xmlns:a="http://schemas.openxmlformats.org/drawingml/2006/main" prst="rect">
             <a:avLst/>
@@ -7359,14 +8324,20 @@
           </a:ln>
         </p:spPr>
         <p:txBody>
-          <a:bodyPr xmlns:a="http://schemas.openxmlformats.org/drawingml/2006/main" lIns="0" tIns="0" rIns="0" bIns="0" anchor="ctr"/>
+          <a:bodyPr xmlns:a="http://schemas.openxmlformats.org/drawingml/2006/main" wrap="square" lIns="0" tIns="0" rIns="0" bIns="0" anchor="ctr">
+            <a:noAutofit/>
+          </a:bodyPr>
           <a:lstStyle xmlns:a="http://schemas.openxmlformats.org/drawingml/2006/main"/>
           <a:p xmlns:a="http://schemas.openxmlformats.org/drawingml/2006/main">
             <a:pPr>
+              <a:buNone/>
               <a:defRPr sz="2400" b="0">
                 <a:solidFill>
                   <a:srgbClr val="152B3A"/>
                 </a:solidFill>
+                <a:latin typeface="Arial"/>
+                <a:ea typeface="Arial"/>
+                <a:cs typeface="Arial"/>
               </a:defRPr>
             </a:pPr>
             <a:r>
@@ -7374,16 +8345,23 @@
                 <a:solidFill>
                   <a:srgbClr val="152B3A"/>
                 </a:solidFill>
+                <a:latin typeface="Arial"/>
+                <a:ea typeface="Arial"/>
+                <a:cs typeface="Arial"/>
               </a:rPr>
               <a:t>String does not shorten itself.</a:t>
             </a:r>
           </a:p>
           <a:p xmlns:a="http://schemas.openxmlformats.org/drawingml/2006/main">
             <a:pPr>
+              <a:buNone/>
               <a:defRPr sz="2400" b="0">
                 <a:solidFill>
                   <a:srgbClr val="152B3A"/>
                 </a:solidFill>
+                <a:latin typeface="Arial"/>
+                <a:ea typeface="Arial"/>
+                <a:cs typeface="Arial"/>
               </a:defRPr>
             </a:pPr>
             <a:r>
@@ -7391,16 +8369,23 @@
                 <a:solidFill>
                   <a:srgbClr val="152B3A"/>
                 </a:solidFill>
+                <a:latin typeface="Arial"/>
+                <a:ea typeface="Arial"/>
+                <a:cs typeface="Arial"/>
               </a:rPr>
               <a:t>Card is not living bone.</a:t>
             </a:r>
           </a:p>
           <a:p xmlns:a="http://schemas.openxmlformats.org/drawingml/2006/main">
             <a:pPr>
+              <a:buNone/>
               <a:defRPr sz="2400" b="0">
                 <a:solidFill>
                   <a:srgbClr val="152B3A"/>
                 </a:solidFill>
+                <a:latin typeface="Arial"/>
+                <a:ea typeface="Arial"/>
+                <a:cs typeface="Arial"/>
               </a:defRPr>
             </a:pPr>
             <a:r>
@@ -7408,12 +8393,121 @@
                 <a:solidFill>
                   <a:srgbClr val="152B3A"/>
                 </a:solidFill>
+                <a:latin typeface="Arial"/>
+                <a:ea typeface="Arial"/>
+                <a:cs typeface="Arial"/>
               </a:rPr>
               <a:t>This is a simplified elbow.</a:t>
             </a:r>
           </a:p>
         </p:txBody>
       </p:sp>
+      <p:sp>
+        <p:nvSpPr>
+          <p:cNvPr id="14" name="">
+            <a:extLst xmlns:a="http://schemas.openxmlformats.org/drawingml/2006/main">
+              <a:ext uri="{FF2B5EF4-FFF2-40B4-BE49-F238E27FC236}">
+                <a16:creationId xmlns:a16="http://schemas.microsoft.com/office/drawing/2014/main" id="{DF7C8C0F-E119-4DF0-AA73-6A90FFE36977}"/>
+              </a:ext>
+            </a:extLst>
+          </p:cNvPr>
+          <p:cNvSpPr>
+            <a:spLocks xmlns:a="http://schemas.openxmlformats.org/drawingml/2006/main" noGrp="1"/>
+          </p:cNvSpPr>
+          <p:nvPr/>
+        </p:nvSpPr>
+        <p:spPr>
+          <a:xfrm xmlns:a="http://schemas.openxmlformats.org/drawingml/2006/main">
+            <a:off x="609600" y="2886075"/>
+            <a:ext cx="5048250" cy="0"/>
+          </a:xfrm>
+          <a:prstGeom xmlns:a="http://schemas.openxmlformats.org/drawingml/2006/main" prst="line">
+            <a:avLst/>
+          </a:prstGeom>
+          <a:noFill xmlns:a="http://schemas.openxmlformats.org/drawingml/2006/main"/>
+          <a:ln xmlns:a="http://schemas.openxmlformats.org/drawingml/2006/main" w="28575">
+            <a:solidFill>
+              <a:srgbClr val="DCE7DD"/>
+            </a:solidFill>
+            <a:prstDash val="solid"/>
+          </a:ln>
+        </p:spPr>
+      </p:sp>
+      <p:sp>
+        <p:nvSpPr>
+          <p:cNvPr id="15" name="">
+            <a:extLst xmlns:a="http://schemas.openxmlformats.org/drawingml/2006/main">
+              <a:ext uri="{FF2B5EF4-FFF2-40B4-BE49-F238E27FC236}">
+                <a16:creationId xmlns:a16="http://schemas.microsoft.com/office/drawing/2014/main" id="{5B3F8AFF-3508-4B6D-BE2C-CB32C15B6D78}"/>
+              </a:ext>
+            </a:extLst>
+          </p:cNvPr>
+          <p:cNvSpPr>
+            <a:spLocks xmlns:a="http://schemas.openxmlformats.org/drawingml/2006/main" noGrp="1"/>
+          </p:cNvSpPr>
+          <p:nvPr/>
+        </p:nvSpPr>
+        <p:spPr>
+          <a:xfrm xmlns:a="http://schemas.openxmlformats.org/drawingml/2006/main">
+            <a:off x="6572250" y="2886075"/>
+            <a:ext cx="5010150" cy="0"/>
+          </a:xfrm>
+          <a:prstGeom xmlns:a="http://schemas.openxmlformats.org/drawingml/2006/main" prst="line">
+            <a:avLst/>
+          </a:prstGeom>
+          <a:noFill xmlns:a="http://schemas.openxmlformats.org/drawingml/2006/main"/>
+          <a:ln xmlns:a="http://schemas.openxmlformats.org/drawingml/2006/main" w="28575">
+            <a:solidFill>
+              <a:srgbClr val="DCE7DD"/>
+            </a:solidFill>
+            <a:prstDash val="solid"/>
+          </a:ln>
+        </p:spPr>
+      </p:sp>
+      <p:pic>
+        <p:nvPicPr>
+          <p:cNvPr id="31" name=""/>
+          <p:cNvPicPr>
+            <a:picLocks xmlns:a="http://schemas.openxmlformats.org/drawingml/2006/main" noChangeAspect="1"/>
+          </p:cNvPicPr>
+          <p:nvPr/>
+        </p:nvPicPr>
+        <p:blipFill>
+          <a:blip xmlns:r="http://schemas.openxmlformats.org/officeDocument/2006/relationships" xmlns:a="http://schemas.openxmlformats.org/drawingml/2006/main" r:embed="R5fb1dd06991a45d7"/>
+          <a:stretch xmlns:a="http://schemas.openxmlformats.org/drawingml/2006/main"/>
+        </p:blipFill>
+        <p:spPr>
+          <a:xfrm xmlns:a="http://schemas.openxmlformats.org/drawingml/2006/main">
+            <a:off x="2109788" y="2952750"/>
+            <a:ext cx="1905000" cy="1428750"/>
+          </a:xfrm>
+          <a:prstGeom xmlns:a="http://schemas.openxmlformats.org/drawingml/2006/main" prst="rect">
+            <a:avLst/>
+          </a:prstGeom>
+        </p:spPr>
+      </p:pic>
+      <p:pic>
+        <p:nvPicPr>
+          <p:cNvPr id="32" name=""/>
+          <p:cNvPicPr>
+            <a:picLocks xmlns:a="http://schemas.openxmlformats.org/drawingml/2006/main" noChangeAspect="1"/>
+          </p:cNvPicPr>
+          <p:nvPr/>
+        </p:nvPicPr>
+        <p:blipFill>
+          <a:blip xmlns:r="http://schemas.openxmlformats.org/officeDocument/2006/relationships" xmlns:a="http://schemas.openxmlformats.org/drawingml/2006/main" r:embed="R866050a0a1f546f0"/>
+          <a:stretch xmlns:a="http://schemas.openxmlformats.org/drawingml/2006/main"/>
+        </p:blipFill>
+        <p:spPr>
+          <a:xfrm xmlns:a="http://schemas.openxmlformats.org/drawingml/2006/main">
+            <a:off x="8072438" y="2952750"/>
+            <a:ext cx="1905000" cy="1428750"/>
+          </a:xfrm>
+          <a:prstGeom xmlns:a="http://schemas.openxmlformats.org/drawingml/2006/main" prst="rect">
+            <a:avLst/>
+          </a:prstGeom>
+        </p:spPr>
+      </p:pic>
     </p:spTree>
     <p:extLst>
       <p:ext uri="{BB962C8B-B14F-4D97-AF65-F5344CB8AC3E}">
@@ -7430,7 +8524,7 @@
     <p:bg>
       <p:bgPr>
         <a:solidFill xmlns:a="http://schemas.openxmlformats.org/drawingml/2006/main">
-          <a:srgbClr val="F5F1E8"/>
+          <a:srgbClr val="FBF9F3"/>
         </a:solidFill>
       </p:bgPr>
     </p:bg>
@@ -7459,8 +8553,8 @@
         </p:nvSpPr>
         <p:spPr>
           <a:xfrm xmlns:a="http://schemas.openxmlformats.org/drawingml/2006/main">
-            <a:off x="609600" y="552450"/>
-            <a:ext cx="781050" cy="57150"/>
+            <a:off x="609600" y="742950"/>
+            <a:ext cx="9906000" cy="38100"/>
           </a:xfrm>
           <a:prstGeom xmlns:a="http://schemas.openxmlformats.org/drawingml/2006/main" prst="rect">
             <a:avLst/>
@@ -7490,8 +8584,8 @@
         </p:nvSpPr>
         <p:spPr>
           <a:xfrm xmlns:a="http://schemas.openxmlformats.org/drawingml/2006/main">
-            <a:off x="609600" y="762000"/>
-            <a:ext cx="9334500" cy="285750"/>
+            <a:off x="609600" y="342900"/>
+            <a:ext cx="9334500" cy="266700"/>
           </a:xfrm>
           <a:prstGeom xmlns:a="http://schemas.openxmlformats.org/drawingml/2006/main" prst="rect">
             <a:avLst/>
@@ -7503,21 +8597,30 @@
           </a:ln>
         </p:spPr>
         <p:txBody>
-          <a:bodyPr xmlns:a="http://schemas.openxmlformats.org/drawingml/2006/main" lIns="0" tIns="0" rIns="0" bIns="0" anchor="ctr"/>
+          <a:bodyPr xmlns:a="http://schemas.openxmlformats.org/drawingml/2006/main" wrap="square" lIns="0" tIns="0" rIns="0" bIns="0" anchor="ctr">
+            <a:noAutofit/>
+          </a:bodyPr>
           <a:lstStyle xmlns:a="http://schemas.openxmlformats.org/drawingml/2006/main"/>
           <a:p xmlns:a="http://schemas.openxmlformats.org/drawingml/2006/main">
             <a:pPr>
-              <a:defRPr sz="1500" b="1">
+              <a:buNone/>
+              <a:defRPr sz="1425" b="1">
                 <a:solidFill>
                   <a:srgbClr val="28685E"/>
                 </a:solidFill>
+                <a:latin typeface="Arial"/>
+                <a:ea typeface="Arial"/>
+                <a:cs typeface="Arial"/>
               </a:defRPr>
             </a:pPr>
             <a:r>
-              <a:rPr sz="1500" b="1">
+              <a:rPr sz="1425" b="1">
                 <a:solidFill>
                   <a:srgbClr val="28685E"/>
                 </a:solidFill>
+                <a:latin typeface="Arial"/>
+                <a:ea typeface="Arial"/>
+                <a:cs typeface="Arial"/>
               </a:rPr>
               <a:t>MADE BY MATT  /  BUILD SCIENCE</a:t>
             </a:r>
@@ -7526,14 +8629,14 @@
       </p:sp>
       <p:pic>
         <p:nvPicPr>
-          <p:cNvPr id="12" name=""/>
+          <p:cNvPr id="14" name=""/>
           <p:cNvPicPr>
             <a:picLocks xmlns:a="http://schemas.openxmlformats.org/drawingml/2006/main" noChangeAspect="1"/>
           </p:cNvPicPr>
           <p:nvPr/>
         </p:nvPicPr>
         <p:blipFill>
-          <a:blip xmlns:r="http://schemas.openxmlformats.org/officeDocument/2006/relationships" xmlns:a="http://schemas.openxmlformats.org/drawingml/2006/main" r:embed="Rd5979aa7666c444a"/>
+          <a:blip xmlns:r="http://schemas.openxmlformats.org/officeDocument/2006/relationships" xmlns:a="http://schemas.openxmlformats.org/drawingml/2006/main" r:embed="Rac057c5f70e8454e"/>
           <a:stretch xmlns:a="http://schemas.openxmlformats.org/drawingml/2006/main"/>
         </p:blipFill>
         <p:spPr>
@@ -7562,8 +8665,8 @@
         </p:nvSpPr>
         <p:spPr>
           <a:xfrm xmlns:a="http://schemas.openxmlformats.org/drawingml/2006/main">
-            <a:off x="609600" y="1352550"/>
-            <a:ext cx="10972800" cy="952500"/>
+            <a:off x="609600" y="1047750"/>
+            <a:ext cx="10972800" cy="895350"/>
           </a:xfrm>
           <a:prstGeom xmlns:a="http://schemas.openxmlformats.org/drawingml/2006/main" prst="rect">
             <a:avLst/>
@@ -7575,21 +8678,30 @@
           </a:ln>
         </p:spPr>
         <p:txBody>
-          <a:bodyPr xmlns:a="http://schemas.openxmlformats.org/drawingml/2006/main" lIns="0" tIns="0" rIns="0" bIns="0" anchor="ctr"/>
+          <a:bodyPr xmlns:a="http://schemas.openxmlformats.org/drawingml/2006/main" wrap="square" lIns="0" tIns="0" rIns="0" bIns="0" anchor="ctr">
+            <a:noAutofit/>
+          </a:bodyPr>
           <a:lstStyle xmlns:a="http://schemas.openxmlformats.org/drawingml/2006/main"/>
           <a:p xmlns:a="http://schemas.openxmlformats.org/drawingml/2006/main">
             <a:pPr>
-              <a:defRPr sz="3750" b="1">
+              <a:buNone/>
+              <a:defRPr sz="3600" b="1">
                 <a:solidFill>
                   <a:srgbClr val="152B3A"/>
                 </a:solidFill>
+                <a:latin typeface="Arial"/>
+                <a:ea typeface="Arial"/>
+                <a:cs typeface="Arial"/>
               </a:defRPr>
             </a:pPr>
             <a:r>
-              <a:rPr sz="3750" b="1">
+              <a:rPr sz="3600" b="1">
                 <a:solidFill>
                   <a:srgbClr val="152B3A"/>
                 </a:solidFill>
+                <a:latin typeface="Arial"/>
+                <a:ea typeface="Arial"/>
+                <a:cs typeface="Arial"/>
               </a:rPr>
               <a:t>Explain both muscle jobs</a:t>
             </a:r>
@@ -7656,21 +8768,30 @@
           </a:ln>
         </p:spPr>
         <p:txBody>
-          <a:bodyPr xmlns:a="http://schemas.openxmlformats.org/drawingml/2006/main" lIns="0" tIns="0" rIns="0" bIns="0" anchor="ctr"/>
+          <a:bodyPr xmlns:a="http://schemas.openxmlformats.org/drawingml/2006/main" wrap="square" lIns="0" tIns="0" rIns="0" bIns="0" anchor="ctr">
+            <a:noAutofit/>
+          </a:bodyPr>
           <a:lstStyle xmlns:a="http://schemas.openxmlformats.org/drawingml/2006/main"/>
           <a:p xmlns:a="http://schemas.openxmlformats.org/drawingml/2006/main">
             <a:pPr>
-              <a:defRPr sz="1275" b="0">
+              <a:buNone/>
+              <a:defRPr sz="1200" b="0">
                 <a:solidFill>
                   <a:srgbClr val="50616B"/>
                 </a:solidFill>
+                <a:latin typeface="Arial"/>
+                <a:ea typeface="Arial"/>
+                <a:cs typeface="Arial"/>
               </a:defRPr>
             </a:pPr>
             <a:r>
-              <a:rPr sz="1275" b="0">
+              <a:rPr sz="1200" b="0">
                 <a:solidFill>
                   <a:srgbClr val="50616B"/>
                 </a:solidFill>
+                <a:latin typeface="Arial"/>
+                <a:ea typeface="Arial"/>
+                <a:cs typeface="Arial"/>
               </a:rPr>
               <a:t>AUTUMN 1  ·  WEEK 4  ·  LESSON A</a:t>
             </a:r>
@@ -7706,14 +8827,20 @@
           </a:ln>
         </p:spPr>
         <p:txBody>
-          <a:bodyPr xmlns:a="http://schemas.openxmlformats.org/drawingml/2006/main" lIns="0" tIns="0" rIns="0" bIns="0" anchor="ctr"/>
+          <a:bodyPr xmlns:a="http://schemas.openxmlformats.org/drawingml/2006/main" wrap="square" lIns="0" tIns="0" rIns="0" bIns="0" anchor="ctr">
+            <a:noAutofit/>
+          </a:bodyPr>
           <a:lstStyle xmlns:a="http://schemas.openxmlformats.org/drawingml/2006/main"/>
           <a:p xmlns:a="http://schemas.openxmlformats.org/drawingml/2006/main">
             <a:pPr>
+              <a:buNone/>
               <a:defRPr sz="1350" b="1">
                 <a:solidFill>
                   <a:srgbClr val="28685E"/>
                 </a:solidFill>
+                <a:latin typeface="Arial"/>
+                <a:ea typeface="Arial"/>
+                <a:cs typeface="Arial"/>
               </a:defRPr>
             </a:pPr>
             <a:r>
@@ -7721,6 +8848,9 @@
                 <a:solidFill>
                   <a:srgbClr val="28685E"/>
                 </a:solidFill>
+                <a:latin typeface="Arial"/>
+                <a:ea typeface="Arial"/>
+                <a:cs typeface="Arial"/>
               </a:rPr>
               <a:t>09</a:t>
             </a:r>
@@ -7743,8 +8873,8 @@
         </p:nvSpPr>
         <p:spPr>
           <a:xfrm xmlns:a="http://schemas.openxmlformats.org/drawingml/2006/main">
-            <a:off x="609600" y="2686050"/>
-            <a:ext cx="10858500" cy="1524000"/>
+            <a:off x="609600" y="2428875"/>
+            <a:ext cx="10972800" cy="2190750"/>
           </a:xfrm>
           <a:prstGeom xmlns:a="http://schemas.openxmlformats.org/drawingml/2006/main" prst="rect">
             <a:avLst/>
@@ -7756,21 +8886,30 @@
           </a:ln>
         </p:spPr>
         <p:txBody>
-          <a:bodyPr xmlns:a="http://schemas.openxmlformats.org/drawingml/2006/main" lIns="0" tIns="0" rIns="0" bIns="0" anchor="ctr"/>
+          <a:bodyPr xmlns:a="http://schemas.openxmlformats.org/drawingml/2006/main" wrap="square" lIns="0" tIns="0" rIns="0" bIns="0" anchor="ctr">
+            <a:noAutofit/>
+          </a:bodyPr>
           <a:lstStyle xmlns:a="http://schemas.openxmlformats.org/drawingml/2006/main"/>
           <a:p xmlns:a="http://schemas.openxmlformats.org/drawingml/2006/main">
             <a:pPr>
-              <a:defRPr sz="2925" b="1">
+              <a:buNone/>
+              <a:defRPr sz="2850" b="1">
                 <a:solidFill>
                   <a:srgbClr val="28685E"/>
                 </a:solidFill>
+                <a:latin typeface="Arial"/>
+                <a:ea typeface="Arial"/>
+                <a:cs typeface="Arial"/>
               </a:defRPr>
             </a:pPr>
             <a:r>
-              <a:rPr sz="2925" b="1">
+              <a:rPr sz="2850" b="1">
                 <a:solidFill>
                   <a:srgbClr val="28685E"/>
                 </a:solidFill>
+                <a:latin typeface="Arial"/>
+                <a:ea typeface="Arial"/>
+                <a:cs typeface="Arial"/>
               </a:rPr>
               <a:t>When the elbow bends, the biceps contracts and the triceps relaxes.</a:t>
             </a:r>
@@ -7793,8 +8932,8 @@
         </p:nvSpPr>
         <p:spPr>
           <a:xfrm xmlns:a="http://schemas.openxmlformats.org/drawingml/2006/main">
-            <a:off x="609600" y="4552950"/>
-            <a:ext cx="10858500" cy="1285875"/>
+            <a:off x="609600" y="4972050"/>
+            <a:ext cx="10972800" cy="981075"/>
           </a:xfrm>
           <a:prstGeom xmlns:a="http://schemas.openxmlformats.org/drawingml/2006/main" prst="rect">
             <a:avLst/>
@@ -7806,21 +8945,30 @@
           </a:ln>
         </p:spPr>
         <p:txBody>
-          <a:bodyPr xmlns:a="http://schemas.openxmlformats.org/drawingml/2006/main" lIns="0" tIns="0" rIns="0" bIns="0" anchor="ctr"/>
+          <a:bodyPr xmlns:a="http://schemas.openxmlformats.org/drawingml/2006/main" wrap="square" lIns="0" tIns="0" rIns="0" bIns="0" anchor="ctr">
+            <a:noAutofit/>
+          </a:bodyPr>
           <a:lstStyle xmlns:a="http://schemas.openxmlformats.org/drawingml/2006/main"/>
           <a:p xmlns:a="http://schemas.openxmlformats.org/drawingml/2006/main">
             <a:pPr>
-              <a:defRPr sz="2700" b="0">
+              <a:buNone/>
+              <a:defRPr sz="2325" b="0">
                 <a:solidFill>
                   <a:srgbClr val="152B3A"/>
                 </a:solidFill>
+                <a:latin typeface="Arial"/>
+                <a:ea typeface="Arial"/>
+                <a:cs typeface="Arial"/>
               </a:defRPr>
             </a:pPr>
             <a:r>
-              <a:rPr sz="2700" b="0">
+              <a:rPr sz="2325" b="0">
                 <a:solidFill>
                   <a:srgbClr val="152B3A"/>
                 </a:solidFill>
+                <a:latin typeface="Arial"/>
+                <a:ea typeface="Arial"/>
+                <a:cs typeface="Arial"/>
               </a:rPr>
               <a:t>When it actively straightens, the pair swaps jobs.</a:t>
             </a:r>
